--- a/presentaciones/Planificacion_Packaging_CL.pptx
+++ b/presentaciones/Planificacion_Packaging_CL.pptx
@@ -14,9 +14,11 @@
     <p:sldId id="2971" r:id="rId8"/>
     <p:sldId id="2969" r:id="rId9"/>
     <p:sldId id="2975" r:id="rId10"/>
+    <p:sldId id="2983" r:id="rId22"/>
     <p:sldId id="2981" r:id="rId11"/>
     <p:sldId id="2982" r:id="rId12"/>
     <p:sldId id="2972" r:id="rId13"/>
+    <p:sldId id="2984" r:id="rId23"/>
     <p:sldId id="2963" r:id="rId14"/>
   </p:sldIdLst>
   <p:sldSz cx="12192000" cy="6858000"/>
@@ -8255,6 +8257,4493 @@
 </p:sld>
 </file>
 
+<file path=ppt/slides/slide10.xml><?xml version="1.0" encoding="utf-8"?>
+<p:sld xmlns:a="http://schemas.openxmlformats.org/drawingml/2006/main" xmlns:r="http://schemas.openxmlformats.org/officeDocument/2006/relationships" xmlns:p="http://schemas.openxmlformats.org/presentationml/2006/main">
+  <p:cSld>
+    <p:spTree>
+      <p:nvGrpSpPr>
+        <p:cNvPr id="1" name=""/>
+        <p:cNvGrpSpPr/>
+        <p:nvPr/>
+      </p:nvGrpSpPr>
+      <p:grpSpPr>
+        <a:xfrm>
+          <a:off x="0" y="0"/>
+          <a:ext cx="0" cy="0"/>
+          <a:chOff x="0" y="0"/>
+          <a:chExt cx="0" cy="0"/>
+        </a:xfrm>
+      </p:grpSpPr>
+      <p:sp>
+        <p:nvSpPr>
+          <p:cNvPr id="2" name="Title 2"/>
+          <p:cNvSpPr>
+            <a:spLocks noGrp="1"/>
+          </p:cNvSpPr>
+          <p:nvPr>
+            <p:ph type="title"/>
+          </p:nvPr>
+        </p:nvSpPr>
+        <p:spPr>
+          <a:xfrm>
+            <a:off x="548640" y="146304"/>
+            <a:ext cx="6766560" cy="731520"/>
+          </a:xfrm>
+        </p:spPr>
+        <p:txBody>
+          <a:bodyPr wrap="square" anchor="ctr"/>
+          <a:lstStyle/>
+          <a:p>
+            <a:pPr algn="l">
+              <a:lnSpc>
+                <a:spcPct val="105000"/>
+              </a:lnSpc>
+              <a:buNone/>
+            </a:pPr>
+            <a:r>
+              <a:rPr lang="es-ES" sz="2300" b="1" i="0" dirty="0">
+                <a:solidFill>
+                  <a:srgbClr val="FFFFFF"/>
+                </a:solidFill>
+                <a:latin typeface="Montserrat"/>
+              </a:rPr>
+              <a:t>Ondupack · Matriz de procesos</a:t>
+            </a:r>
+          </a:p>
+        </p:txBody>
+      </p:sp>
+      <p:sp>
+        <p:nvSpPr>
+          <p:cNvPr id="3" name="Shape 3"/>
+          <p:cNvSpPr/>
+          <p:nvPr/>
+        </p:nvSpPr>
+        <p:spPr>
+          <a:xfrm>
+            <a:off x="7360920" y="310896"/>
+            <a:ext cx="2240280" cy="329184"/>
+          </a:xfrm>
+          <a:prstGeom prst="roundRect">
+            <a:avLst>
+              <a:gd name="adj" fmla="val 50000"/>
+            </a:avLst>
+          </a:prstGeom>
+          <a:solidFill>
+            <a:srgbClr val="98C9EB"/>
+          </a:solidFill>
+          <a:ln>
+            <a:noFill/>
+          </a:ln>
+        </p:spPr>
+        <p:txBody>
+          <a:bodyPr wrap="square" lIns="0" tIns="0" rIns="0" bIns="0" rtlCol="0" anchor="ctr">
+            <a:noAutofit/>
+          </a:bodyPr>
+          <a:lstStyle/>
+          <a:p>
+            <a:pPr algn="ctr">
+              <a:lnSpc>
+                <a:spcPct val="105000"/>
+              </a:lnSpc>
+              <a:buNone/>
+            </a:pPr>
+            <a:r>
+              <a:rPr lang="es-ES" sz="850" b="1" i="0" spc="40" dirty="0">
+                <a:solidFill>
+                  <a:srgbClr val="00263A"/>
+                </a:solidFill>
+                <a:latin typeface="Montserrat"/>
+                <a:cs typeface="Montserrat"/>
+              </a:rPr>
+              <a:t>6 DE 8 IMPLANTADOS</a:t>
+            </a:r>
+            <a:endParaRPr lang="es-ES" sz="850" dirty="0"/>
+          </a:p>
+        </p:txBody>
+      </p:sp>
+      <p:sp>
+        <p:nvSpPr>
+          <p:cNvPr id="4" name="Shape 4"/>
+          <p:cNvSpPr txBox="1"/>
+          <p:nvPr/>
+        </p:nvSpPr>
+        <p:spPr>
+          <a:xfrm>
+            <a:off x="685800" y="1280160"/>
+            <a:ext cx="2148840" cy="201168"/>
+          </a:xfrm>
+          <a:prstGeom prst="rect">
+            <a:avLst/>
+          </a:prstGeom>
+          <a:noFill/>
+          <a:ln>
+            <a:noFill/>
+          </a:ln>
+        </p:spPr>
+        <p:txBody>
+          <a:bodyPr wrap="square" lIns="0" tIns="0" rIns="0" bIns="0" rtlCol="0" anchor="t">
+            <a:noAutofit/>
+          </a:bodyPr>
+          <a:lstStyle/>
+          <a:p>
+            <a:pPr algn="l">
+              <a:lnSpc>
+                <a:spcPct val="105000"/>
+              </a:lnSpc>
+              <a:buNone/>
+            </a:pPr>
+            <a:r>
+              <a:rPr lang="es-ES" sz="850" b="1" i="0" spc="120" dirty="0">
+                <a:solidFill>
+                  <a:srgbClr val="244C5A"/>
+                </a:solidFill>
+                <a:latin typeface="Montserrat"/>
+                <a:cs typeface="Montserrat"/>
+              </a:rPr>
+              <a:t>PROCESO</a:t>
+            </a:r>
+            <a:endParaRPr lang="es-ES" sz="850" dirty="0"/>
+          </a:p>
+        </p:txBody>
+      </p:sp>
+      <p:sp>
+        <p:nvSpPr>
+          <p:cNvPr id="5" name="Shape 5"/>
+          <p:cNvSpPr txBox="1"/>
+          <p:nvPr/>
+        </p:nvSpPr>
+        <p:spPr>
+          <a:xfrm>
+            <a:off x="2807208" y="1280160"/>
+            <a:ext cx="1371600" cy="201168"/>
+          </a:xfrm>
+          <a:prstGeom prst="rect">
+            <a:avLst/>
+          </a:prstGeom>
+          <a:noFill/>
+          <a:ln>
+            <a:noFill/>
+          </a:ln>
+        </p:spPr>
+        <p:txBody>
+          <a:bodyPr wrap="square" lIns="0" tIns="0" rIns="0" bIns="0" rtlCol="0" anchor="t">
+            <a:noAutofit/>
+          </a:bodyPr>
+          <a:lstStyle/>
+          <a:p>
+            <a:pPr algn="l">
+              <a:lnSpc>
+                <a:spcPct val="105000"/>
+              </a:lnSpc>
+              <a:buNone/>
+            </a:pPr>
+            <a:r>
+              <a:rPr lang="es-ES" sz="850" b="1" i="0" spc="120" dirty="0">
+                <a:solidFill>
+                  <a:srgbClr val="244C5A"/>
+                </a:solidFill>
+                <a:latin typeface="Montserrat"/>
+                <a:cs typeface="Montserrat"/>
+              </a:rPr>
+              <a:t>ESTADO</a:t>
+            </a:r>
+            <a:endParaRPr lang="es-ES" sz="850" dirty="0"/>
+          </a:p>
+        </p:txBody>
+      </p:sp>
+      <p:sp>
+        <p:nvSpPr>
+          <p:cNvPr id="6" name="Shape 6"/>
+          <p:cNvSpPr txBox="1"/>
+          <p:nvPr/>
+        </p:nvSpPr>
+        <p:spPr>
+          <a:xfrm>
+            <a:off x="4425696" y="1280160"/>
+            <a:ext cx="4617720" cy="201168"/>
+          </a:xfrm>
+          <a:prstGeom prst="rect">
+            <a:avLst/>
+          </a:prstGeom>
+          <a:noFill/>
+          <a:ln>
+            <a:noFill/>
+          </a:ln>
+        </p:spPr>
+        <p:txBody>
+          <a:bodyPr wrap="square" lIns="0" tIns="0" rIns="0" bIns="0" rtlCol="0" anchor="t">
+            <a:noAutofit/>
+          </a:bodyPr>
+          <a:lstStyle/>
+          <a:p>
+            <a:pPr algn="l">
+              <a:lnSpc>
+                <a:spcPct val="105000"/>
+              </a:lnSpc>
+              <a:buNone/>
+            </a:pPr>
+            <a:r>
+              <a:rPr lang="es-ES" sz="850" b="1" i="0" spc="120" dirty="0">
+                <a:solidFill>
+                  <a:srgbClr val="244C5A"/>
+                </a:solidFill>
+                <a:latin typeface="Montserrat"/>
+                <a:cs typeface="Montserrat"/>
+              </a:rPr>
+              <a:t>QUÉ TENEMOS HOY</a:t>
+            </a:r>
+            <a:endParaRPr lang="es-ES" sz="850" dirty="0"/>
+          </a:p>
+        </p:txBody>
+      </p:sp>
+      <p:sp>
+        <p:nvSpPr>
+          <p:cNvPr id="7" name="Shape 7"/>
+          <p:cNvSpPr txBox="1"/>
+          <p:nvPr/>
+        </p:nvSpPr>
+        <p:spPr>
+          <a:xfrm>
+            <a:off x="9153144" y="1280160"/>
+            <a:ext cx="2624328" cy="201168"/>
+          </a:xfrm>
+          <a:prstGeom prst="rect">
+            <a:avLst/>
+          </a:prstGeom>
+          <a:noFill/>
+          <a:ln>
+            <a:noFill/>
+          </a:ln>
+        </p:spPr>
+        <p:txBody>
+          <a:bodyPr wrap="square" lIns="0" tIns="0" rIns="0" bIns="0" rtlCol="0" anchor="t">
+            <a:noAutofit/>
+          </a:bodyPr>
+          <a:lstStyle/>
+          <a:p>
+            <a:pPr algn="l">
+              <a:lnSpc>
+                <a:spcPct val="105000"/>
+              </a:lnSpc>
+              <a:buNone/>
+            </a:pPr>
+            <a:r>
+              <a:rPr lang="es-ES" sz="850" b="1" i="0" spc="120" dirty="0">
+                <a:solidFill>
+                  <a:srgbClr val="244C5A"/>
+                </a:solidFill>
+                <a:latin typeface="Montserrat"/>
+                <a:cs typeface="Montserrat"/>
+              </a:rPr>
+              <a:t>SIGUIENTE PASO</a:t>
+            </a:r>
+            <a:endParaRPr lang="es-ES" sz="850" dirty="0"/>
+          </a:p>
+        </p:txBody>
+      </p:sp>
+      <p:sp>
+        <p:nvSpPr>
+          <p:cNvPr id="8" name="Shape 8"/>
+          <p:cNvSpPr/>
+          <p:nvPr/>
+        </p:nvSpPr>
+        <p:spPr>
+          <a:xfrm>
+            <a:off x="548640" y="1572768"/>
+            <a:ext cx="11091672" cy="438912"/>
+          </a:xfrm>
+          <a:prstGeom prst="roundRect">
+            <a:avLst>
+              <a:gd name="adj" fmla="val 12500"/>
+            </a:avLst>
+          </a:prstGeom>
+          <a:solidFill>
+            <a:srgbClr val="F5F7F8"/>
+          </a:solidFill>
+          <a:ln>
+            <a:noFill/>
+          </a:ln>
+        </p:spPr>
+        <p:txBody>
+          <a:bodyPr wrap="square" lIns="0" tIns="0" rIns="0" bIns="0" rtlCol="0" anchor="t">
+            <a:noAutofit/>
+          </a:bodyPr>
+          <a:lstStyle/>
+          <a:p>
+            <a:endParaRPr lang="es-ES" dirty="0"/>
+          </a:p>
+        </p:txBody>
+      </p:sp>
+      <p:sp>
+        <p:nvSpPr>
+          <p:cNvPr id="9" name="Shape 9"/>
+          <p:cNvSpPr/>
+          <p:nvPr/>
+        </p:nvSpPr>
+        <p:spPr>
+          <a:xfrm>
+            <a:off x="685800" y="1655064"/>
+            <a:ext cx="274320" cy="274320"/>
+          </a:xfrm>
+          <a:prstGeom prst="ellipse">
+            <a:avLst/>
+          </a:prstGeom>
+          <a:solidFill>
+            <a:srgbClr val="00263A"/>
+          </a:solidFill>
+          <a:ln>
+            <a:noFill/>
+          </a:ln>
+        </p:spPr>
+        <p:txBody>
+          <a:bodyPr wrap="square" lIns="0" tIns="0" rIns="0" bIns="0" rtlCol="0" anchor="ctr">
+            <a:noAutofit/>
+          </a:bodyPr>
+          <a:lstStyle/>
+          <a:p>
+            <a:pPr algn="ctr">
+              <a:lnSpc>
+                <a:spcPct val="105000"/>
+              </a:lnSpc>
+              <a:buNone/>
+            </a:pPr>
+            <a:r>
+              <a:rPr lang="es-ES" sz="900" b="1" i="0" dirty="0">
+                <a:solidFill>
+                  <a:srgbClr val="FFFFFF"/>
+                </a:solidFill>
+                <a:latin typeface="Montserrat"/>
+                <a:cs typeface="Montserrat"/>
+              </a:rPr>
+              <a:t>1</a:t>
+            </a:r>
+            <a:endParaRPr lang="es-ES" sz="900" dirty="0"/>
+          </a:p>
+        </p:txBody>
+      </p:sp>
+      <p:sp>
+        <p:nvSpPr>
+          <p:cNvPr id="10" name="Shape 10"/>
+          <p:cNvSpPr txBox="1"/>
+          <p:nvPr/>
+        </p:nvSpPr>
+        <p:spPr>
+          <a:xfrm>
+            <a:off x="1078992" y="1572768"/>
+            <a:ext cx="1600200" cy="438912"/>
+          </a:xfrm>
+          <a:prstGeom prst="rect">
+            <a:avLst/>
+          </a:prstGeom>
+          <a:noFill/>
+          <a:ln>
+            <a:noFill/>
+          </a:ln>
+        </p:spPr>
+        <p:txBody>
+          <a:bodyPr wrap="square" lIns="0" tIns="0" rIns="0" bIns="0" rtlCol="0" anchor="ctr">
+            <a:noAutofit/>
+          </a:bodyPr>
+          <a:lstStyle/>
+          <a:p>
+            <a:pPr algn="l">
+              <a:lnSpc>
+                <a:spcPct val="105000"/>
+              </a:lnSpc>
+              <a:buNone/>
+            </a:pPr>
+            <a:r>
+              <a:rPr lang="es-ES" sz="1100" b="1" i="0" dirty="0">
+                <a:solidFill>
+                  <a:srgbClr val="00263A"/>
+                </a:solidFill>
+                <a:latin typeface="Montserrat"/>
+                <a:cs typeface="Montserrat"/>
+              </a:rPr>
+              <a:t>Dato maestro</a:t>
+            </a:r>
+            <a:endParaRPr lang="es-ES" sz="1100" dirty="0"/>
+          </a:p>
+        </p:txBody>
+      </p:sp>
+      <p:sp>
+        <p:nvSpPr>
+          <p:cNvPr id="11" name="Shape 11"/>
+          <p:cNvSpPr/>
+          <p:nvPr/>
+        </p:nvSpPr>
+        <p:spPr>
+          <a:xfrm>
+            <a:off x="2807208" y="1664208"/>
+            <a:ext cx="1371600" cy="256032"/>
+          </a:xfrm>
+          <a:prstGeom prst="roundRect">
+            <a:avLst>
+              <a:gd name="adj" fmla="val 50000"/>
+            </a:avLst>
+          </a:prstGeom>
+          <a:solidFill>
+            <a:srgbClr val="00263A"/>
+          </a:solidFill>
+          <a:ln>
+            <a:noFill/>
+          </a:ln>
+        </p:spPr>
+        <p:txBody>
+          <a:bodyPr wrap="square" lIns="0" tIns="0" rIns="0" bIns="0" rtlCol="0" anchor="ctr">
+            <a:noAutofit/>
+          </a:bodyPr>
+          <a:lstStyle/>
+          <a:p>
+            <a:pPr algn="ctr">
+              <a:lnSpc>
+                <a:spcPct val="105000"/>
+              </a:lnSpc>
+              <a:buNone/>
+            </a:pPr>
+            <a:r>
+              <a:rPr lang="es-ES" sz="750" b="1" i="0" spc="40" dirty="0">
+                <a:solidFill>
+                  <a:srgbClr val="FFFFFF"/>
+                </a:solidFill>
+                <a:latin typeface="Montserrat"/>
+                <a:cs typeface="Montserrat"/>
+              </a:rPr>
+              <a:t>IMPLANTADO</a:t>
+            </a:r>
+            <a:endParaRPr lang="es-ES" sz="750" dirty="0"/>
+          </a:p>
+        </p:txBody>
+      </p:sp>
+      <p:sp>
+        <p:nvSpPr>
+          <p:cNvPr id="12" name="Shape 12"/>
+          <p:cNvSpPr txBox="1"/>
+          <p:nvPr/>
+        </p:nvSpPr>
+        <p:spPr>
+          <a:xfrm>
+            <a:off x="4425696" y="1572768"/>
+            <a:ext cx="4434840" cy="438912"/>
+          </a:xfrm>
+          <a:prstGeom prst="rect">
+            <a:avLst/>
+          </a:prstGeom>
+          <a:noFill/>
+          <a:ln>
+            <a:noFill/>
+          </a:ln>
+        </p:spPr>
+        <p:txBody>
+          <a:bodyPr wrap="square" lIns="0" tIns="0" rIns="0" bIns="0" rtlCol="0" anchor="ctr">
+            <a:noAutofit/>
+          </a:bodyPr>
+          <a:lstStyle/>
+          <a:p>
+            <a:pPr algn="l">
+              <a:lnSpc>
+                <a:spcPct val="100000"/>
+              </a:lnSpc>
+              <a:buNone/>
+            </a:pPr>
+            <a:r>
+              <a:rPr lang="es-ES" sz="900" b="0" i="0" dirty="0">
+                <a:solidFill>
+                  <a:srgbClr val="00263A"/>
+                </a:solidFill>
+                <a:latin typeface="Montserrat"/>
+                <a:cs typeface="Montserrat"/>
+              </a:rPr>
+              <a:t>Velocidades objetivo de onduladora y converting, con propuesta según las reales; calendario de turnos, días y paradas por máquina</a:t>
+            </a:r>
+            <a:endParaRPr lang="es-ES" sz="900" dirty="0"/>
+          </a:p>
+        </p:txBody>
+      </p:sp>
+      <p:sp>
+        <p:nvSpPr>
+          <p:cNvPr id="13" name="Shape 13"/>
+          <p:cNvSpPr txBox="1"/>
+          <p:nvPr/>
+        </p:nvSpPr>
+        <p:spPr>
+          <a:xfrm>
+            <a:off x="9153144" y="1572768"/>
+            <a:ext cx="2395728" cy="438912"/>
+          </a:xfrm>
+          <a:prstGeom prst="rect">
+            <a:avLst/>
+          </a:prstGeom>
+          <a:noFill/>
+          <a:ln>
+            <a:noFill/>
+          </a:ln>
+        </p:spPr>
+        <p:txBody>
+          <a:bodyPr wrap="square" lIns="0" tIns="0" rIns="0" bIns="0" rtlCol="0" anchor="ctr">
+            <a:noAutofit/>
+          </a:bodyPr>
+          <a:lstStyle/>
+          <a:p>
+            <a:pPr algn="l">
+              <a:lnSpc>
+                <a:spcPct val="100000"/>
+              </a:lnSpc>
+              <a:buNone/>
+            </a:pPr>
+            <a:r>
+              <a:rPr lang="es-ES" sz="1000" b="0" i="0" dirty="0">
+                <a:solidFill>
+                  <a:srgbClr val="9AA9B4"/>
+                </a:solidFill>
+                <a:latin typeface="Montserrat"/>
+                <a:cs typeface="Montserrat"/>
+              </a:rPr>
+              <a:t>—</a:t>
+            </a:r>
+            <a:endParaRPr lang="es-ES" sz="1000" dirty="0"/>
+          </a:p>
+        </p:txBody>
+      </p:sp>
+      <p:sp>
+        <p:nvSpPr>
+          <p:cNvPr id="14" name="Shape 14"/>
+          <p:cNvSpPr/>
+          <p:nvPr/>
+        </p:nvSpPr>
+        <p:spPr>
+          <a:xfrm>
+            <a:off x="548640" y="2066544"/>
+            <a:ext cx="11091672" cy="438912"/>
+          </a:xfrm>
+          <a:prstGeom prst="roundRect">
+            <a:avLst>
+              <a:gd name="adj" fmla="val 12500"/>
+            </a:avLst>
+          </a:prstGeom>
+          <a:solidFill>
+            <a:srgbClr val="F5F7F8"/>
+          </a:solidFill>
+          <a:ln>
+            <a:noFill/>
+          </a:ln>
+        </p:spPr>
+        <p:txBody>
+          <a:bodyPr wrap="square" lIns="0" tIns="0" rIns="0" bIns="0" rtlCol="0" anchor="t">
+            <a:noAutofit/>
+          </a:bodyPr>
+          <a:lstStyle/>
+          <a:p>
+            <a:endParaRPr lang="es-ES" dirty="0"/>
+          </a:p>
+        </p:txBody>
+      </p:sp>
+      <p:sp>
+        <p:nvSpPr>
+          <p:cNvPr id="15" name="Shape 15"/>
+          <p:cNvSpPr/>
+          <p:nvPr/>
+        </p:nvSpPr>
+        <p:spPr>
+          <a:xfrm>
+            <a:off x="685800" y="2148840"/>
+            <a:ext cx="274320" cy="274320"/>
+          </a:xfrm>
+          <a:prstGeom prst="ellipse">
+            <a:avLst/>
+          </a:prstGeom>
+          <a:solidFill>
+            <a:srgbClr val="00263A"/>
+          </a:solidFill>
+          <a:ln>
+            <a:noFill/>
+          </a:ln>
+        </p:spPr>
+        <p:txBody>
+          <a:bodyPr wrap="square" lIns="0" tIns="0" rIns="0" bIns="0" rtlCol="0" anchor="ctr">
+            <a:noAutofit/>
+          </a:bodyPr>
+          <a:lstStyle/>
+          <a:p>
+            <a:pPr algn="ctr">
+              <a:lnSpc>
+                <a:spcPct val="105000"/>
+              </a:lnSpc>
+              <a:buNone/>
+            </a:pPr>
+            <a:r>
+              <a:rPr lang="es-ES" sz="900" b="1" i="0" dirty="0">
+                <a:solidFill>
+                  <a:srgbClr val="FFFFFF"/>
+                </a:solidFill>
+                <a:latin typeface="Montserrat"/>
+                <a:cs typeface="Montserrat"/>
+              </a:rPr>
+              <a:t>2</a:t>
+            </a:r>
+            <a:endParaRPr lang="es-ES" sz="900" dirty="0"/>
+          </a:p>
+        </p:txBody>
+      </p:sp>
+      <p:sp>
+        <p:nvSpPr>
+          <p:cNvPr id="16" name="Shape 16"/>
+          <p:cNvSpPr txBox="1"/>
+          <p:nvPr/>
+        </p:nvSpPr>
+        <p:spPr>
+          <a:xfrm>
+            <a:off x="1078992" y="2066544"/>
+            <a:ext cx="1600200" cy="438912"/>
+          </a:xfrm>
+          <a:prstGeom prst="rect">
+            <a:avLst/>
+          </a:prstGeom>
+          <a:noFill/>
+          <a:ln>
+            <a:noFill/>
+          </a:ln>
+        </p:spPr>
+        <p:txBody>
+          <a:bodyPr wrap="square" lIns="0" tIns="0" rIns="0" bIns="0" rtlCol="0" anchor="ctr">
+            <a:noAutofit/>
+          </a:bodyPr>
+          <a:lstStyle/>
+          <a:p>
+            <a:pPr algn="l">
+              <a:lnSpc>
+                <a:spcPct val="105000"/>
+              </a:lnSpc>
+              <a:buNone/>
+            </a:pPr>
+            <a:r>
+              <a:rPr lang="es-ES" sz="1100" b="1" i="0" dirty="0">
+                <a:solidFill>
+                  <a:srgbClr val="00263A"/>
+                </a:solidFill>
+                <a:latin typeface="Montserrat"/>
+                <a:cs typeface="Montserrat"/>
+              </a:rPr>
+              <a:t>Demanda</a:t>
+            </a:r>
+            <a:endParaRPr lang="es-ES" sz="1100" dirty="0"/>
+          </a:p>
+        </p:txBody>
+      </p:sp>
+      <p:sp>
+        <p:nvSpPr>
+          <p:cNvPr id="17" name="Shape 17"/>
+          <p:cNvSpPr/>
+          <p:nvPr/>
+        </p:nvSpPr>
+        <p:spPr>
+          <a:xfrm>
+            <a:off x="2807208" y="2157984"/>
+            <a:ext cx="1371600" cy="256032"/>
+          </a:xfrm>
+          <a:prstGeom prst="roundRect">
+            <a:avLst>
+              <a:gd name="adj" fmla="val 50000"/>
+            </a:avLst>
+          </a:prstGeom>
+          <a:solidFill>
+            <a:srgbClr val="F5F7F8"/>
+          </a:solidFill>
+          <a:ln w="15875">
+            <a:solidFill>
+              <a:srgbClr val="D7DFE5"/>
+            </a:solidFill>
+          </a:ln>
+        </p:spPr>
+        <p:txBody>
+          <a:bodyPr wrap="square" lIns="0" tIns="0" rIns="0" bIns="0" rtlCol="0" anchor="ctr">
+            <a:noAutofit/>
+          </a:bodyPr>
+          <a:lstStyle/>
+          <a:p>
+            <a:pPr algn="ctr">
+              <a:lnSpc>
+                <a:spcPct val="105000"/>
+              </a:lnSpc>
+              <a:buNone/>
+            </a:pPr>
+            <a:r>
+              <a:rPr lang="es-ES" sz="750" b="1" i="0" spc="40" dirty="0">
+                <a:solidFill>
+                  <a:srgbClr val="9AA9B4"/>
+                </a:solidFill>
+                <a:latin typeface="Montserrat"/>
+                <a:cs typeface="Montserrat"/>
+              </a:rPr>
+              <a:t>SIN ABORDAR</a:t>
+            </a:r>
+            <a:endParaRPr lang="es-ES" sz="750" dirty="0"/>
+          </a:p>
+        </p:txBody>
+      </p:sp>
+      <p:sp>
+        <p:nvSpPr>
+          <p:cNvPr id="18" name="Shape 18"/>
+          <p:cNvSpPr txBox="1"/>
+          <p:nvPr/>
+        </p:nvSpPr>
+        <p:spPr>
+          <a:xfrm>
+            <a:off x="4425696" y="2066544"/>
+            <a:ext cx="4434840" cy="438912"/>
+          </a:xfrm>
+          <a:prstGeom prst="rect">
+            <a:avLst/>
+          </a:prstGeom>
+          <a:noFill/>
+          <a:ln>
+            <a:noFill/>
+          </a:ln>
+        </p:spPr>
+        <p:txBody>
+          <a:bodyPr wrap="square" lIns="0" tIns="0" rIns="0" bIns="0" rtlCol="0" anchor="ctr">
+            <a:noAutofit/>
+          </a:bodyPr>
+          <a:lstStyle/>
+          <a:p>
+            <a:pPr algn="l">
+              <a:lnSpc>
+                <a:spcPct val="100000"/>
+              </a:lnSpc>
+              <a:buNone/>
+            </a:pPr>
+            <a:r>
+              <a:rPr lang="es-ES" sz="900" b="0" i="0" dirty="0">
+                <a:solidFill>
+                  <a:srgbClr val="00263A"/>
+                </a:solidFill>
+                <a:latin typeface="Montserrat"/>
+                <a:cs typeface="Montserrat"/>
+              </a:rPr>
+              <a:t>Se planifica contra los pedidos de cartera; sin desarrollos de previsión</a:t>
+            </a:r>
+            <a:endParaRPr lang="es-ES" sz="900" dirty="0"/>
+          </a:p>
+        </p:txBody>
+      </p:sp>
+      <p:sp>
+        <p:nvSpPr>
+          <p:cNvPr id="19" name="Shape 19"/>
+          <p:cNvSpPr txBox="1"/>
+          <p:nvPr/>
+        </p:nvSpPr>
+        <p:spPr>
+          <a:xfrm>
+            <a:off x="9153144" y="2066544"/>
+            <a:ext cx="2395728" cy="438912"/>
+          </a:xfrm>
+          <a:prstGeom prst="rect">
+            <a:avLst/>
+          </a:prstGeom>
+          <a:noFill/>
+          <a:ln>
+            <a:noFill/>
+          </a:ln>
+        </p:spPr>
+        <p:txBody>
+          <a:bodyPr wrap="square" lIns="0" tIns="0" rIns="0" bIns="0" rtlCol="0" anchor="ctr">
+            <a:noAutofit/>
+          </a:bodyPr>
+          <a:lstStyle/>
+          <a:p>
+            <a:pPr algn="l">
+              <a:lnSpc>
+                <a:spcPct val="100000"/>
+              </a:lnSpc>
+              <a:buNone/>
+            </a:pPr>
+            <a:r>
+              <a:rPr lang="es-ES" sz="900" b="0" i="1" dirty="0">
+                <a:solidFill>
+                  <a:srgbClr val="9AA9B4"/>
+                </a:solidFill>
+                <a:latin typeface="Montserrat"/>
+                <a:cs typeface="Montserrat"/>
+              </a:rPr>
+              <a:t>Por definir</a:t>
+            </a:r>
+            <a:endParaRPr lang="es-ES" sz="900" dirty="0"/>
+          </a:p>
+        </p:txBody>
+      </p:sp>
+      <p:sp>
+        <p:nvSpPr>
+          <p:cNvPr id="20" name="Shape 20"/>
+          <p:cNvSpPr/>
+          <p:nvPr/>
+        </p:nvSpPr>
+        <p:spPr>
+          <a:xfrm>
+            <a:off x="548640" y="2560320"/>
+            <a:ext cx="11091672" cy="438912"/>
+          </a:xfrm>
+          <a:prstGeom prst="roundRect">
+            <a:avLst>
+              <a:gd name="adj" fmla="val 12500"/>
+            </a:avLst>
+          </a:prstGeom>
+          <a:solidFill>
+            <a:srgbClr val="F5F7F8"/>
+          </a:solidFill>
+          <a:ln>
+            <a:noFill/>
+          </a:ln>
+        </p:spPr>
+        <p:txBody>
+          <a:bodyPr wrap="square" lIns="0" tIns="0" rIns="0" bIns="0" rtlCol="0" anchor="t">
+            <a:noAutofit/>
+          </a:bodyPr>
+          <a:lstStyle/>
+          <a:p>
+            <a:endParaRPr lang="es-ES" dirty="0"/>
+          </a:p>
+        </p:txBody>
+      </p:sp>
+      <p:sp>
+        <p:nvSpPr>
+          <p:cNvPr id="21" name="Shape 21"/>
+          <p:cNvSpPr/>
+          <p:nvPr/>
+        </p:nvSpPr>
+        <p:spPr>
+          <a:xfrm>
+            <a:off x="685800" y="2642616"/>
+            <a:ext cx="274320" cy="274320"/>
+          </a:xfrm>
+          <a:prstGeom prst="ellipse">
+            <a:avLst/>
+          </a:prstGeom>
+          <a:solidFill>
+            <a:srgbClr val="00263A"/>
+          </a:solidFill>
+          <a:ln>
+            <a:noFill/>
+          </a:ln>
+        </p:spPr>
+        <p:txBody>
+          <a:bodyPr wrap="square" lIns="0" tIns="0" rIns="0" bIns="0" rtlCol="0" anchor="ctr">
+            <a:noAutofit/>
+          </a:bodyPr>
+          <a:lstStyle/>
+          <a:p>
+            <a:pPr algn="ctr">
+              <a:lnSpc>
+                <a:spcPct val="105000"/>
+              </a:lnSpc>
+              <a:buNone/>
+            </a:pPr>
+            <a:r>
+              <a:rPr lang="es-ES" sz="900" b="1" i="0" dirty="0">
+                <a:solidFill>
+                  <a:srgbClr val="FFFFFF"/>
+                </a:solidFill>
+                <a:latin typeface="Montserrat"/>
+                <a:cs typeface="Montserrat"/>
+              </a:rPr>
+              <a:t>3</a:t>
+            </a:r>
+            <a:endParaRPr lang="es-ES" sz="900" dirty="0"/>
+          </a:p>
+        </p:txBody>
+      </p:sp>
+      <p:sp>
+        <p:nvSpPr>
+          <p:cNvPr id="22" name="Shape 22"/>
+          <p:cNvSpPr txBox="1"/>
+          <p:nvPr/>
+        </p:nvSpPr>
+        <p:spPr>
+          <a:xfrm>
+            <a:off x="1078992" y="2560320"/>
+            <a:ext cx="1600200" cy="438912"/>
+          </a:xfrm>
+          <a:prstGeom prst="rect">
+            <a:avLst/>
+          </a:prstGeom>
+          <a:noFill/>
+          <a:ln>
+            <a:noFill/>
+          </a:ln>
+        </p:spPr>
+        <p:txBody>
+          <a:bodyPr wrap="square" lIns="0" tIns="0" rIns="0" bIns="0" rtlCol="0" anchor="ctr">
+            <a:noAutofit/>
+          </a:bodyPr>
+          <a:lstStyle/>
+          <a:p>
+            <a:pPr algn="l">
+              <a:lnSpc>
+                <a:spcPct val="105000"/>
+              </a:lnSpc>
+              <a:buNone/>
+            </a:pPr>
+            <a:r>
+              <a:rPr lang="es-ES" sz="1100" b="1" i="0" dirty="0">
+                <a:solidFill>
+                  <a:srgbClr val="00263A"/>
+                </a:solidFill>
+                <a:latin typeface="Montserrat"/>
+                <a:cs typeface="Montserrat"/>
+              </a:rPr>
+              <a:t>Cartera</a:t>
+            </a:r>
+            <a:endParaRPr lang="es-ES" sz="1100" dirty="0"/>
+          </a:p>
+        </p:txBody>
+      </p:sp>
+      <p:sp>
+        <p:nvSpPr>
+          <p:cNvPr id="23" name="Shape 23"/>
+          <p:cNvSpPr/>
+          <p:nvPr/>
+        </p:nvSpPr>
+        <p:spPr>
+          <a:xfrm>
+            <a:off x="2807208" y="2651760"/>
+            <a:ext cx="1371600" cy="256032"/>
+          </a:xfrm>
+          <a:prstGeom prst="roundRect">
+            <a:avLst>
+              <a:gd name="adj" fmla="val 50000"/>
+            </a:avLst>
+          </a:prstGeom>
+          <a:solidFill>
+            <a:srgbClr val="00263A"/>
+          </a:solidFill>
+          <a:ln>
+            <a:noFill/>
+          </a:ln>
+        </p:spPr>
+        <p:txBody>
+          <a:bodyPr wrap="square" lIns="0" tIns="0" rIns="0" bIns="0" rtlCol="0" anchor="ctr">
+            <a:noAutofit/>
+          </a:bodyPr>
+          <a:lstStyle/>
+          <a:p>
+            <a:pPr algn="ctr">
+              <a:lnSpc>
+                <a:spcPct val="105000"/>
+              </a:lnSpc>
+              <a:buNone/>
+            </a:pPr>
+            <a:r>
+              <a:rPr lang="es-ES" sz="750" b="1" i="0" spc="40" dirty="0">
+                <a:solidFill>
+                  <a:srgbClr val="FFFFFF"/>
+                </a:solidFill>
+                <a:latin typeface="Montserrat"/>
+                <a:cs typeface="Montserrat"/>
+              </a:rPr>
+              <a:t>IMPLANTADO</a:t>
+            </a:r>
+            <a:endParaRPr lang="es-ES" sz="750" dirty="0"/>
+          </a:p>
+        </p:txBody>
+      </p:sp>
+      <p:sp>
+        <p:nvSpPr>
+          <p:cNvPr id="24" name="Shape 24"/>
+          <p:cNvSpPr txBox="1"/>
+          <p:nvPr/>
+        </p:nvSpPr>
+        <p:spPr>
+          <a:xfrm>
+            <a:off x="4425696" y="2560320"/>
+            <a:ext cx="4434840" cy="438912"/>
+          </a:xfrm>
+          <a:prstGeom prst="rect">
+            <a:avLst/>
+          </a:prstGeom>
+          <a:noFill/>
+          <a:ln>
+            <a:noFill/>
+          </a:ln>
+        </p:spPr>
+        <p:txBody>
+          <a:bodyPr wrap="square" lIns="0" tIns="0" rIns="0" bIns="0" rtlCol="0" anchor="ctr">
+            <a:noAutofit/>
+          </a:bodyPr>
+          <a:lstStyle/>
+          <a:p>
+            <a:pPr algn="l">
+              <a:lnSpc>
+                <a:spcPct val="100000"/>
+              </a:lnSpc>
+              <a:buNone/>
+            </a:pPr>
+            <a:r>
+              <a:rPr lang="es-ES" sz="900" b="1" i="0" dirty="0">
+                <a:solidFill>
+                  <a:srgbClr val="00263A"/>
+                </a:solidFill>
+                <a:latin typeface="Montserrat"/>
+                <a:cs typeface="Montserrat"/>
+              </a:rPr>
+              <a:t>Ya existía: </a:t>
+            </a:r>
+            <a:r>
+              <a:rPr lang="es-ES" sz="900" b="0" i="0" dirty="0">
+                <a:solidFill>
+                  <a:srgbClr val="00263A"/>
+                </a:solidFill>
+                <a:latin typeface="Montserrat"/>
+                <a:cs typeface="Montserrat"/>
+              </a:rPr>
+              <a:t>pedidos pendientes y selección hacia Combiplan, el pool de pedidos que combinan bien</a:t>
+            </a:r>
+            <a:endParaRPr lang="es-ES" sz="900" dirty="0"/>
+          </a:p>
+        </p:txBody>
+      </p:sp>
+      <p:sp>
+        <p:nvSpPr>
+          <p:cNvPr id="25" name="Shape 25"/>
+          <p:cNvSpPr txBox="1"/>
+          <p:nvPr/>
+        </p:nvSpPr>
+        <p:spPr>
+          <a:xfrm>
+            <a:off x="9153144" y="2560320"/>
+            <a:ext cx="2395728" cy="438912"/>
+          </a:xfrm>
+          <a:prstGeom prst="rect">
+            <a:avLst/>
+          </a:prstGeom>
+          <a:noFill/>
+          <a:ln>
+            <a:noFill/>
+          </a:ln>
+        </p:spPr>
+        <p:txBody>
+          <a:bodyPr wrap="square" lIns="0" tIns="0" rIns="0" bIns="0" rtlCol="0" anchor="ctr">
+            <a:noAutofit/>
+          </a:bodyPr>
+          <a:lstStyle/>
+          <a:p>
+            <a:pPr algn="l">
+              <a:lnSpc>
+                <a:spcPct val="100000"/>
+              </a:lnSpc>
+              <a:buNone/>
+            </a:pPr>
+            <a:r>
+              <a:rPr lang="es-ES" sz="1000" b="0" i="0" dirty="0">
+                <a:solidFill>
+                  <a:srgbClr val="9AA9B4"/>
+                </a:solidFill>
+                <a:latin typeface="Montserrat"/>
+                <a:cs typeface="Montserrat"/>
+              </a:rPr>
+              <a:t>—</a:t>
+            </a:r>
+            <a:endParaRPr lang="es-ES" sz="1000" dirty="0"/>
+          </a:p>
+        </p:txBody>
+      </p:sp>
+      <p:sp>
+        <p:nvSpPr>
+          <p:cNvPr id="26" name="Shape 26"/>
+          <p:cNvSpPr/>
+          <p:nvPr/>
+        </p:nvSpPr>
+        <p:spPr>
+          <a:xfrm>
+            <a:off x="548640" y="3054096"/>
+            <a:ext cx="11091672" cy="438912"/>
+          </a:xfrm>
+          <a:prstGeom prst="roundRect">
+            <a:avLst>
+              <a:gd name="adj" fmla="val 12500"/>
+            </a:avLst>
+          </a:prstGeom>
+          <a:solidFill>
+            <a:srgbClr val="F5F7F8"/>
+          </a:solidFill>
+          <a:ln>
+            <a:noFill/>
+          </a:ln>
+        </p:spPr>
+        <p:txBody>
+          <a:bodyPr wrap="square" lIns="0" tIns="0" rIns="0" bIns="0" rtlCol="0" anchor="t">
+            <a:noAutofit/>
+          </a:bodyPr>
+          <a:lstStyle/>
+          <a:p>
+            <a:endParaRPr lang="es-ES" dirty="0"/>
+          </a:p>
+        </p:txBody>
+      </p:sp>
+      <p:sp>
+        <p:nvSpPr>
+          <p:cNvPr id="27" name="Shape 27"/>
+          <p:cNvSpPr/>
+          <p:nvPr/>
+        </p:nvSpPr>
+        <p:spPr>
+          <a:xfrm>
+            <a:off x="685800" y="3136392"/>
+            <a:ext cx="274320" cy="274320"/>
+          </a:xfrm>
+          <a:prstGeom prst="ellipse">
+            <a:avLst/>
+          </a:prstGeom>
+          <a:solidFill>
+            <a:srgbClr val="00263A"/>
+          </a:solidFill>
+          <a:ln>
+            <a:noFill/>
+          </a:ln>
+        </p:spPr>
+        <p:txBody>
+          <a:bodyPr wrap="square" lIns="0" tIns="0" rIns="0" bIns="0" rtlCol="0" anchor="ctr">
+            <a:noAutofit/>
+          </a:bodyPr>
+          <a:lstStyle/>
+          <a:p>
+            <a:pPr algn="ctr">
+              <a:lnSpc>
+                <a:spcPct val="105000"/>
+              </a:lnSpc>
+              <a:buNone/>
+            </a:pPr>
+            <a:r>
+              <a:rPr lang="es-ES" sz="900" b="1" i="0" dirty="0">
+                <a:solidFill>
+                  <a:srgbClr val="FFFFFF"/>
+                </a:solidFill>
+                <a:latin typeface="Montserrat"/>
+                <a:cs typeface="Montserrat"/>
+              </a:rPr>
+              <a:t>4</a:t>
+            </a:r>
+            <a:endParaRPr lang="es-ES" sz="900" dirty="0"/>
+          </a:p>
+        </p:txBody>
+      </p:sp>
+      <p:sp>
+        <p:nvSpPr>
+          <p:cNvPr id="28" name="Shape 28"/>
+          <p:cNvSpPr txBox="1"/>
+          <p:nvPr/>
+        </p:nvSpPr>
+        <p:spPr>
+          <a:xfrm>
+            <a:off x="1078992" y="3054096"/>
+            <a:ext cx="1600200" cy="438912"/>
+          </a:xfrm>
+          <a:prstGeom prst="rect">
+            <a:avLst/>
+          </a:prstGeom>
+          <a:noFill/>
+          <a:ln>
+            <a:noFill/>
+          </a:ln>
+        </p:spPr>
+        <p:txBody>
+          <a:bodyPr wrap="square" lIns="0" tIns="0" rIns="0" bIns="0" rtlCol="0" anchor="ctr">
+            <a:noAutofit/>
+          </a:bodyPr>
+          <a:lstStyle/>
+          <a:p>
+            <a:pPr algn="l">
+              <a:lnSpc>
+                <a:spcPct val="105000"/>
+              </a:lnSpc>
+              <a:buNone/>
+            </a:pPr>
+            <a:r>
+              <a:rPr lang="es-ES" sz="1100" b="1" i="0" dirty="0">
+                <a:solidFill>
+                  <a:srgbClr val="00263A"/>
+                </a:solidFill>
+                <a:latin typeface="Montserrat"/>
+                <a:cs typeface="Montserrat"/>
+              </a:rPr>
+              <a:t>Necesidades</a:t>
+            </a:r>
+            <a:endParaRPr lang="es-ES" sz="1100" dirty="0"/>
+          </a:p>
+        </p:txBody>
+      </p:sp>
+      <p:sp>
+        <p:nvSpPr>
+          <p:cNvPr id="29" name="Shape 29"/>
+          <p:cNvSpPr/>
+          <p:nvPr/>
+        </p:nvSpPr>
+        <p:spPr>
+          <a:xfrm>
+            <a:off x="2807208" y="3145536"/>
+            <a:ext cx="1371600" cy="256032"/>
+          </a:xfrm>
+          <a:prstGeom prst="roundRect">
+            <a:avLst>
+              <a:gd name="adj" fmla="val 50000"/>
+            </a:avLst>
+          </a:prstGeom>
+          <a:solidFill>
+            <a:srgbClr val="98C9EB"/>
+          </a:solidFill>
+          <a:ln>
+            <a:noFill/>
+          </a:ln>
+        </p:spPr>
+        <p:txBody>
+          <a:bodyPr wrap="square" lIns="0" tIns="0" rIns="0" bIns="0" rtlCol="0" anchor="ctr">
+            <a:noAutofit/>
+          </a:bodyPr>
+          <a:lstStyle/>
+          <a:p>
+            <a:pPr algn="ctr">
+              <a:lnSpc>
+                <a:spcPct val="105000"/>
+              </a:lnSpc>
+              <a:buNone/>
+            </a:pPr>
+            <a:r>
+              <a:rPr lang="es-ES" sz="750" b="1" i="0" spc="40" dirty="0">
+                <a:solidFill>
+                  <a:srgbClr val="00263A"/>
+                </a:solidFill>
+                <a:latin typeface="Montserrat"/>
+                <a:cs typeface="Montserrat"/>
+              </a:rPr>
+              <a:t>PARCIAL</a:t>
+            </a:r>
+            <a:endParaRPr lang="es-ES" sz="750" dirty="0"/>
+          </a:p>
+        </p:txBody>
+      </p:sp>
+      <p:sp>
+        <p:nvSpPr>
+          <p:cNvPr id="30" name="Shape 30"/>
+          <p:cNvSpPr txBox="1"/>
+          <p:nvPr/>
+        </p:nvSpPr>
+        <p:spPr>
+          <a:xfrm>
+            <a:off x="4425696" y="3054096"/>
+            <a:ext cx="4434840" cy="438912"/>
+          </a:xfrm>
+          <a:prstGeom prst="rect">
+            <a:avLst/>
+          </a:prstGeom>
+          <a:noFill/>
+          <a:ln>
+            <a:noFill/>
+          </a:ln>
+        </p:spPr>
+        <p:txBody>
+          <a:bodyPr wrap="square" lIns="0" tIns="0" rIns="0" bIns="0" rtlCol="0" anchor="ctr">
+            <a:noAutofit/>
+          </a:bodyPr>
+          <a:lstStyle/>
+          <a:p>
+            <a:pPr algn="l">
+              <a:lnSpc>
+                <a:spcPct val="100000"/>
+              </a:lnSpc>
+              <a:buNone/>
+            </a:pPr>
+            <a:r>
+              <a:rPr lang="es-ES" sz="900" b="0" i="0" dirty="0">
+                <a:solidFill>
+                  <a:srgbClr val="00263A"/>
+                </a:solidFill>
+                <a:latin typeface="Montserrat"/>
+                <a:cs typeface="Montserrat"/>
+              </a:rPr>
+              <a:t>Faltas de cartón para converting detectadas en el control de producción, con su efecto en fechas</a:t>
+            </a:r>
+            <a:endParaRPr lang="es-ES" sz="900" dirty="0"/>
+          </a:p>
+        </p:txBody>
+      </p:sp>
+      <p:sp>
+        <p:nvSpPr>
+          <p:cNvPr id="31" name="Shape 31"/>
+          <p:cNvSpPr txBox="1"/>
+          <p:nvPr/>
+        </p:nvSpPr>
+        <p:spPr>
+          <a:xfrm>
+            <a:off x="9153144" y="3054096"/>
+            <a:ext cx="2395728" cy="438912"/>
+          </a:xfrm>
+          <a:prstGeom prst="rect">
+            <a:avLst/>
+          </a:prstGeom>
+          <a:noFill/>
+          <a:ln>
+            <a:noFill/>
+          </a:ln>
+        </p:spPr>
+        <p:txBody>
+          <a:bodyPr wrap="square" lIns="0" tIns="0" rIns="0" bIns="0" rtlCol="0" anchor="ctr">
+            <a:noAutofit/>
+          </a:bodyPr>
+          <a:lstStyle/>
+          <a:p>
+            <a:pPr algn="l">
+              <a:lnSpc>
+                <a:spcPct val="100000"/>
+              </a:lnSpc>
+              <a:buNone/>
+            </a:pPr>
+            <a:r>
+              <a:rPr lang="es-ES" sz="900" b="0" i="1" dirty="0">
+                <a:solidFill>
+                  <a:srgbClr val="9AA9B4"/>
+                </a:solidFill>
+                <a:latin typeface="Montserrat"/>
+                <a:cs typeface="Montserrat"/>
+              </a:rPr>
+              <a:t>Por definir</a:t>
+            </a:r>
+            <a:endParaRPr lang="es-ES" sz="900" dirty="0"/>
+          </a:p>
+        </p:txBody>
+      </p:sp>
+      <p:sp>
+        <p:nvSpPr>
+          <p:cNvPr id="32" name="Shape 32"/>
+          <p:cNvSpPr/>
+          <p:nvPr/>
+        </p:nvSpPr>
+        <p:spPr>
+          <a:xfrm>
+            <a:off x="548640" y="3547872"/>
+            <a:ext cx="11091672" cy="438912"/>
+          </a:xfrm>
+          <a:prstGeom prst="roundRect">
+            <a:avLst>
+              <a:gd name="adj" fmla="val 12500"/>
+            </a:avLst>
+          </a:prstGeom>
+          <a:solidFill>
+            <a:srgbClr val="F5F7F8"/>
+          </a:solidFill>
+          <a:ln>
+            <a:noFill/>
+          </a:ln>
+        </p:spPr>
+        <p:txBody>
+          <a:bodyPr wrap="square" lIns="0" tIns="0" rIns="0" bIns="0" rtlCol="0" anchor="t">
+            <a:noAutofit/>
+          </a:bodyPr>
+          <a:lstStyle/>
+          <a:p>
+            <a:endParaRPr lang="es-ES" dirty="0"/>
+          </a:p>
+        </p:txBody>
+      </p:sp>
+      <p:sp>
+        <p:nvSpPr>
+          <p:cNvPr id="33" name="Shape 33"/>
+          <p:cNvSpPr/>
+          <p:nvPr/>
+        </p:nvSpPr>
+        <p:spPr>
+          <a:xfrm>
+            <a:off x="685800" y="3630168"/>
+            <a:ext cx="274320" cy="274320"/>
+          </a:xfrm>
+          <a:prstGeom prst="ellipse">
+            <a:avLst/>
+          </a:prstGeom>
+          <a:solidFill>
+            <a:srgbClr val="00263A"/>
+          </a:solidFill>
+          <a:ln>
+            <a:noFill/>
+          </a:ln>
+        </p:spPr>
+        <p:txBody>
+          <a:bodyPr wrap="square" lIns="0" tIns="0" rIns="0" bIns="0" rtlCol="0" anchor="ctr">
+            <a:noAutofit/>
+          </a:bodyPr>
+          <a:lstStyle/>
+          <a:p>
+            <a:pPr algn="ctr">
+              <a:lnSpc>
+                <a:spcPct val="105000"/>
+              </a:lnSpc>
+              <a:buNone/>
+            </a:pPr>
+            <a:r>
+              <a:rPr lang="es-ES" sz="900" b="1" i="0" dirty="0">
+                <a:solidFill>
+                  <a:srgbClr val="FFFFFF"/>
+                </a:solidFill>
+                <a:latin typeface="Montserrat"/>
+                <a:cs typeface="Montserrat"/>
+              </a:rPr>
+              <a:t>5</a:t>
+            </a:r>
+            <a:endParaRPr lang="es-ES" sz="900" dirty="0"/>
+          </a:p>
+        </p:txBody>
+      </p:sp>
+      <p:sp>
+        <p:nvSpPr>
+          <p:cNvPr id="34" name="Shape 34"/>
+          <p:cNvSpPr txBox="1"/>
+          <p:nvPr/>
+        </p:nvSpPr>
+        <p:spPr>
+          <a:xfrm>
+            <a:off x="1078992" y="3547872"/>
+            <a:ext cx="1600200" cy="438912"/>
+          </a:xfrm>
+          <a:prstGeom prst="rect">
+            <a:avLst/>
+          </a:prstGeom>
+          <a:noFill/>
+          <a:ln>
+            <a:noFill/>
+          </a:ln>
+        </p:spPr>
+        <p:txBody>
+          <a:bodyPr wrap="square" lIns="0" tIns="0" rIns="0" bIns="0" rtlCol="0" anchor="ctr">
+            <a:noAutofit/>
+          </a:bodyPr>
+          <a:lstStyle/>
+          <a:p>
+            <a:pPr algn="l">
+              <a:lnSpc>
+                <a:spcPct val="105000"/>
+              </a:lnSpc>
+              <a:buNone/>
+            </a:pPr>
+            <a:r>
+              <a:rPr lang="es-ES" sz="1100" b="1" i="0" dirty="0">
+                <a:solidFill>
+                  <a:srgbClr val="00263A"/>
+                </a:solidFill>
+                <a:latin typeface="Montserrat"/>
+                <a:cs typeface="Montserrat"/>
+              </a:rPr>
+              <a:t>Capacidad</a:t>
+            </a:r>
+            <a:endParaRPr lang="es-ES" sz="1100" dirty="0"/>
+          </a:p>
+        </p:txBody>
+      </p:sp>
+      <p:sp>
+        <p:nvSpPr>
+          <p:cNvPr id="35" name="Shape 35"/>
+          <p:cNvSpPr/>
+          <p:nvPr/>
+        </p:nvSpPr>
+        <p:spPr>
+          <a:xfrm>
+            <a:off x="2807208" y="3639312"/>
+            <a:ext cx="1371600" cy="256032"/>
+          </a:xfrm>
+          <a:prstGeom prst="roundRect">
+            <a:avLst>
+              <a:gd name="adj" fmla="val 50000"/>
+            </a:avLst>
+          </a:prstGeom>
+          <a:solidFill>
+            <a:srgbClr val="00263A"/>
+          </a:solidFill>
+          <a:ln>
+            <a:noFill/>
+          </a:ln>
+        </p:spPr>
+        <p:txBody>
+          <a:bodyPr wrap="square" lIns="0" tIns="0" rIns="0" bIns="0" rtlCol="0" anchor="ctr">
+            <a:noAutofit/>
+          </a:bodyPr>
+          <a:lstStyle/>
+          <a:p>
+            <a:pPr algn="ctr">
+              <a:lnSpc>
+                <a:spcPct val="105000"/>
+              </a:lnSpc>
+              <a:buNone/>
+            </a:pPr>
+            <a:r>
+              <a:rPr lang="es-ES" sz="750" b="1" i="0" spc="40" dirty="0">
+                <a:solidFill>
+                  <a:srgbClr val="FFFFFF"/>
+                </a:solidFill>
+                <a:latin typeface="Montserrat"/>
+                <a:cs typeface="Montserrat"/>
+              </a:rPr>
+              <a:t>IMPLANTADO</a:t>
+            </a:r>
+            <a:endParaRPr lang="es-ES" sz="750" dirty="0"/>
+          </a:p>
+        </p:txBody>
+      </p:sp>
+      <p:sp>
+        <p:nvSpPr>
+          <p:cNvPr id="36" name="Shape 36"/>
+          <p:cNvSpPr txBox="1"/>
+          <p:nvPr/>
+        </p:nvSpPr>
+        <p:spPr>
+          <a:xfrm>
+            <a:off x="4425696" y="3547872"/>
+            <a:ext cx="4434840" cy="438912"/>
+          </a:xfrm>
+          <a:prstGeom prst="rect">
+            <a:avLst/>
+          </a:prstGeom>
+          <a:noFill/>
+          <a:ln>
+            <a:noFill/>
+          </a:ln>
+        </p:spPr>
+        <p:txBody>
+          <a:bodyPr wrap="square" lIns="0" tIns="0" rIns="0" bIns="0" rtlCol="0" anchor="ctr">
+            <a:noAutofit/>
+          </a:bodyPr>
+          <a:lstStyle/>
+          <a:p>
+            <a:pPr algn="l">
+              <a:lnSpc>
+                <a:spcPct val="100000"/>
+              </a:lnSpc>
+              <a:buNone/>
+            </a:pPr>
+            <a:r>
+              <a:rPr lang="es-ES" sz="900" b="0" i="0" dirty="0">
+                <a:solidFill>
+                  <a:srgbClr val="00263A"/>
+                </a:solidFill>
+                <a:latin typeface="Montserrat"/>
+                <a:cs typeface="Montserrat"/>
+              </a:rPr>
+              <a:t>Carga diaria por máquina (lanzado y cartera) y saturación prevista de los almacenes de WIP y producto terminado</a:t>
+            </a:r>
+            <a:endParaRPr lang="es-ES" sz="900" dirty="0"/>
+          </a:p>
+        </p:txBody>
+      </p:sp>
+      <p:sp>
+        <p:nvSpPr>
+          <p:cNvPr id="37" name="Shape 37"/>
+          <p:cNvSpPr txBox="1"/>
+          <p:nvPr/>
+        </p:nvSpPr>
+        <p:spPr>
+          <a:xfrm>
+            <a:off x="9153144" y="3547872"/>
+            <a:ext cx="2395728" cy="438912"/>
+          </a:xfrm>
+          <a:prstGeom prst="rect">
+            <a:avLst/>
+          </a:prstGeom>
+          <a:noFill/>
+          <a:ln>
+            <a:noFill/>
+          </a:ln>
+        </p:spPr>
+        <p:txBody>
+          <a:bodyPr wrap="square" lIns="0" tIns="0" rIns="0" bIns="0" rtlCol="0" anchor="ctr">
+            <a:noAutofit/>
+          </a:bodyPr>
+          <a:lstStyle/>
+          <a:p>
+            <a:pPr algn="l">
+              <a:lnSpc>
+                <a:spcPct val="100000"/>
+              </a:lnSpc>
+              <a:buNone/>
+            </a:pPr>
+            <a:r>
+              <a:rPr lang="es-ES" sz="1000" b="0" i="0" dirty="0">
+                <a:solidFill>
+                  <a:srgbClr val="9AA9B4"/>
+                </a:solidFill>
+                <a:latin typeface="Montserrat"/>
+                <a:cs typeface="Montserrat"/>
+              </a:rPr>
+              <a:t>—</a:t>
+            </a:r>
+            <a:endParaRPr lang="es-ES" sz="1000" dirty="0"/>
+          </a:p>
+        </p:txBody>
+      </p:sp>
+      <p:sp>
+        <p:nvSpPr>
+          <p:cNvPr id="38" name="Shape 38"/>
+          <p:cNvSpPr/>
+          <p:nvPr/>
+        </p:nvSpPr>
+        <p:spPr>
+          <a:xfrm>
+            <a:off x="548640" y="4041648"/>
+            <a:ext cx="11091672" cy="438912"/>
+          </a:xfrm>
+          <a:prstGeom prst="roundRect">
+            <a:avLst>
+              <a:gd name="adj" fmla="val 12500"/>
+            </a:avLst>
+          </a:prstGeom>
+          <a:solidFill>
+            <a:srgbClr val="F5F7F8"/>
+          </a:solidFill>
+          <a:ln>
+            <a:noFill/>
+          </a:ln>
+        </p:spPr>
+        <p:txBody>
+          <a:bodyPr wrap="square" lIns="0" tIns="0" rIns="0" bIns="0" rtlCol="0" anchor="t">
+            <a:noAutofit/>
+          </a:bodyPr>
+          <a:lstStyle/>
+          <a:p>
+            <a:endParaRPr lang="es-ES" dirty="0"/>
+          </a:p>
+        </p:txBody>
+      </p:sp>
+      <p:sp>
+        <p:nvSpPr>
+          <p:cNvPr id="39" name="Shape 39"/>
+          <p:cNvSpPr/>
+          <p:nvPr/>
+        </p:nvSpPr>
+        <p:spPr>
+          <a:xfrm>
+            <a:off x="9015984" y="4041648"/>
+            <a:ext cx="2624328" cy="438912"/>
+          </a:xfrm>
+          <a:prstGeom prst="roundRect">
+            <a:avLst>
+              <a:gd name="adj" fmla="val 12500"/>
+            </a:avLst>
+          </a:prstGeom>
+          <a:solidFill>
+            <a:srgbClr val="EAF3FA"/>
+          </a:solidFill>
+          <a:ln w="9525">
+            <a:solidFill>
+              <a:srgbClr val="98C9EB"/>
+            </a:solidFill>
+          </a:ln>
+        </p:spPr>
+        <p:txBody>
+          <a:bodyPr wrap="square" lIns="0" tIns="0" rIns="0" bIns="0" rtlCol="0" anchor="t">
+            <a:noAutofit/>
+          </a:bodyPr>
+          <a:lstStyle/>
+          <a:p>
+            <a:endParaRPr lang="es-ES" dirty="0"/>
+          </a:p>
+        </p:txBody>
+      </p:sp>
+      <p:sp>
+        <p:nvSpPr>
+          <p:cNvPr id="40" name="Shape 40"/>
+          <p:cNvSpPr/>
+          <p:nvPr/>
+        </p:nvSpPr>
+        <p:spPr>
+          <a:xfrm>
+            <a:off x="685800" y="4123944"/>
+            <a:ext cx="274320" cy="274320"/>
+          </a:xfrm>
+          <a:prstGeom prst="ellipse">
+            <a:avLst/>
+          </a:prstGeom>
+          <a:solidFill>
+            <a:srgbClr val="00263A"/>
+          </a:solidFill>
+          <a:ln>
+            <a:noFill/>
+          </a:ln>
+        </p:spPr>
+        <p:txBody>
+          <a:bodyPr wrap="square" lIns="0" tIns="0" rIns="0" bIns="0" rtlCol="0" anchor="ctr">
+            <a:noAutofit/>
+          </a:bodyPr>
+          <a:lstStyle/>
+          <a:p>
+            <a:pPr algn="ctr">
+              <a:lnSpc>
+                <a:spcPct val="105000"/>
+              </a:lnSpc>
+              <a:buNone/>
+            </a:pPr>
+            <a:r>
+              <a:rPr lang="es-ES" sz="900" b="1" i="0" dirty="0">
+                <a:solidFill>
+                  <a:srgbClr val="FFFFFF"/>
+                </a:solidFill>
+                <a:latin typeface="Montserrat"/>
+                <a:cs typeface="Montserrat"/>
+              </a:rPr>
+              <a:t>6</a:t>
+            </a:r>
+            <a:endParaRPr lang="es-ES" sz="900" dirty="0"/>
+          </a:p>
+        </p:txBody>
+      </p:sp>
+      <p:sp>
+        <p:nvSpPr>
+          <p:cNvPr id="41" name="Shape 41"/>
+          <p:cNvSpPr txBox="1"/>
+          <p:nvPr/>
+        </p:nvSpPr>
+        <p:spPr>
+          <a:xfrm>
+            <a:off x="1078992" y="4041648"/>
+            <a:ext cx="1600200" cy="438912"/>
+          </a:xfrm>
+          <a:prstGeom prst="rect">
+            <a:avLst/>
+          </a:prstGeom>
+          <a:noFill/>
+          <a:ln>
+            <a:noFill/>
+          </a:ln>
+        </p:spPr>
+        <p:txBody>
+          <a:bodyPr wrap="square" lIns="0" tIns="0" rIns="0" bIns="0" rtlCol="0" anchor="ctr">
+            <a:noAutofit/>
+          </a:bodyPr>
+          <a:lstStyle/>
+          <a:p>
+            <a:pPr algn="l">
+              <a:lnSpc>
+                <a:spcPct val="105000"/>
+              </a:lnSpc>
+              <a:buNone/>
+            </a:pPr>
+            <a:r>
+              <a:rPr lang="es-ES" sz="1100" b="1" i="0" dirty="0">
+                <a:solidFill>
+                  <a:srgbClr val="00263A"/>
+                </a:solidFill>
+                <a:latin typeface="Montserrat"/>
+                <a:cs typeface="Montserrat"/>
+              </a:rPr>
+              <a:t>Programación</a:t>
+            </a:r>
+            <a:endParaRPr lang="es-ES" sz="1100" dirty="0"/>
+          </a:p>
+        </p:txBody>
+      </p:sp>
+      <p:sp>
+        <p:nvSpPr>
+          <p:cNvPr id="42" name="Shape 42"/>
+          <p:cNvSpPr/>
+          <p:nvPr/>
+        </p:nvSpPr>
+        <p:spPr>
+          <a:xfrm>
+            <a:off x="2807208" y="4133088"/>
+            <a:ext cx="1371600" cy="256032"/>
+          </a:xfrm>
+          <a:prstGeom prst="roundRect">
+            <a:avLst>
+              <a:gd name="adj" fmla="val 50000"/>
+            </a:avLst>
+          </a:prstGeom>
+          <a:solidFill>
+            <a:srgbClr val="00263A"/>
+          </a:solidFill>
+          <a:ln>
+            <a:noFill/>
+          </a:ln>
+        </p:spPr>
+        <p:txBody>
+          <a:bodyPr wrap="square" lIns="0" tIns="0" rIns="0" bIns="0" rtlCol="0" anchor="ctr">
+            <a:noAutofit/>
+          </a:bodyPr>
+          <a:lstStyle/>
+          <a:p>
+            <a:pPr algn="ctr">
+              <a:lnSpc>
+                <a:spcPct val="105000"/>
+              </a:lnSpc>
+              <a:buNone/>
+            </a:pPr>
+            <a:r>
+              <a:rPr lang="es-ES" sz="750" b="1" i="0" spc="40" dirty="0">
+                <a:solidFill>
+                  <a:srgbClr val="FFFFFF"/>
+                </a:solidFill>
+                <a:latin typeface="Montserrat"/>
+                <a:cs typeface="Montserrat"/>
+              </a:rPr>
+              <a:t>IMPLANTADO</a:t>
+            </a:r>
+            <a:endParaRPr lang="es-ES" sz="750" dirty="0"/>
+          </a:p>
+        </p:txBody>
+      </p:sp>
+      <p:sp>
+        <p:nvSpPr>
+          <p:cNvPr id="43" name="Shape 43"/>
+          <p:cNvSpPr txBox="1"/>
+          <p:nvPr/>
+        </p:nvSpPr>
+        <p:spPr>
+          <a:xfrm>
+            <a:off x="4425696" y="4041648"/>
+            <a:ext cx="4434840" cy="438912"/>
+          </a:xfrm>
+          <a:prstGeom prst="rect">
+            <a:avLst/>
+          </a:prstGeom>
+          <a:noFill/>
+          <a:ln>
+            <a:noFill/>
+          </a:ln>
+        </p:spPr>
+        <p:txBody>
+          <a:bodyPr wrap="square" lIns="0" tIns="0" rIns="0" bIns="0" rtlCol="0" anchor="ctr">
+            <a:noAutofit/>
+          </a:bodyPr>
+          <a:lstStyle/>
+          <a:p>
+            <a:pPr algn="l">
+              <a:lnSpc>
+                <a:spcPct val="100000"/>
+              </a:lnSpc>
+              <a:buNone/>
+            </a:pPr>
+            <a:r>
+              <a:rPr lang="es-ES" sz="900" b="0" i="0" dirty="0">
+                <a:solidFill>
+                  <a:srgbClr val="00263A"/>
+                </a:solidFill>
+                <a:latin typeface="Montserrat"/>
+                <a:cs typeface="Montserrat"/>
+              </a:rPr>
+              <a:t>Fechas de inicio y fin con velocidades y tiempos de cambio reales; combinación de pedidos en Combiplan</a:t>
+            </a:r>
+            <a:endParaRPr lang="es-ES" sz="900" dirty="0"/>
+          </a:p>
+        </p:txBody>
+      </p:sp>
+      <p:sp>
+        <p:nvSpPr>
+          <p:cNvPr id="44" name="Shape 44"/>
+          <p:cNvSpPr txBox="1"/>
+          <p:nvPr/>
+        </p:nvSpPr>
+        <p:spPr>
+          <a:xfrm>
+            <a:off x="9153144" y="4041648"/>
+            <a:ext cx="2395728" cy="438912"/>
+          </a:xfrm>
+          <a:prstGeom prst="rect">
+            <a:avLst/>
+          </a:prstGeom>
+          <a:noFill/>
+          <a:ln>
+            <a:noFill/>
+          </a:ln>
+        </p:spPr>
+        <p:txBody>
+          <a:bodyPr wrap="square" lIns="0" tIns="0" rIns="0" bIns="0" rtlCol="0" anchor="ctr">
+            <a:noAutofit/>
+          </a:bodyPr>
+          <a:lstStyle/>
+          <a:p>
+            <a:pPr algn="l">
+              <a:lnSpc>
+                <a:spcPct val="100000"/>
+              </a:lnSpc>
+              <a:buNone/>
+            </a:pPr>
+            <a:r>
+              <a:rPr lang="es-ES" sz="900" b="1" i="0" dirty="0">
+                <a:solidFill>
+                  <a:srgbClr val="00263A"/>
+                </a:solidFill>
+                <a:latin typeface="Montserrat"/>
+                <a:cs typeface="Montserrat"/>
+              </a:rPr>
+              <a:t>Algoritmo de combinación automática (propuesta 2027)</a:t>
+            </a:r>
+            <a:endParaRPr lang="es-ES" sz="900" dirty="0"/>
+          </a:p>
+        </p:txBody>
+      </p:sp>
+      <p:sp>
+        <p:nvSpPr>
+          <p:cNvPr id="45" name="Shape 45"/>
+          <p:cNvSpPr/>
+          <p:nvPr/>
+        </p:nvSpPr>
+        <p:spPr>
+          <a:xfrm>
+            <a:off x="548640" y="4535424"/>
+            <a:ext cx="11091672" cy="438912"/>
+          </a:xfrm>
+          <a:prstGeom prst="roundRect">
+            <a:avLst>
+              <a:gd name="adj" fmla="val 12500"/>
+            </a:avLst>
+          </a:prstGeom>
+          <a:solidFill>
+            <a:srgbClr val="F5F7F8"/>
+          </a:solidFill>
+          <a:ln>
+            <a:noFill/>
+          </a:ln>
+        </p:spPr>
+        <p:txBody>
+          <a:bodyPr wrap="square" lIns="0" tIns="0" rIns="0" bIns="0" rtlCol="0" anchor="t">
+            <a:noAutofit/>
+          </a:bodyPr>
+          <a:lstStyle/>
+          <a:p>
+            <a:endParaRPr lang="es-ES" dirty="0"/>
+          </a:p>
+        </p:txBody>
+      </p:sp>
+      <p:sp>
+        <p:nvSpPr>
+          <p:cNvPr id="46" name="Shape 46"/>
+          <p:cNvSpPr/>
+          <p:nvPr/>
+        </p:nvSpPr>
+        <p:spPr>
+          <a:xfrm>
+            <a:off x="685800" y="4617720"/>
+            <a:ext cx="274320" cy="274320"/>
+          </a:xfrm>
+          <a:prstGeom prst="ellipse">
+            <a:avLst/>
+          </a:prstGeom>
+          <a:solidFill>
+            <a:srgbClr val="00263A"/>
+          </a:solidFill>
+          <a:ln>
+            <a:noFill/>
+          </a:ln>
+        </p:spPr>
+        <p:txBody>
+          <a:bodyPr wrap="square" lIns="0" tIns="0" rIns="0" bIns="0" rtlCol="0" anchor="ctr">
+            <a:noAutofit/>
+          </a:bodyPr>
+          <a:lstStyle/>
+          <a:p>
+            <a:pPr algn="ctr">
+              <a:lnSpc>
+                <a:spcPct val="105000"/>
+              </a:lnSpc>
+              <a:buNone/>
+            </a:pPr>
+            <a:r>
+              <a:rPr lang="es-ES" sz="900" b="1" i="0" dirty="0">
+                <a:solidFill>
+                  <a:srgbClr val="FFFFFF"/>
+                </a:solidFill>
+                <a:latin typeface="Montserrat"/>
+                <a:cs typeface="Montserrat"/>
+              </a:rPr>
+              <a:t>7</a:t>
+            </a:r>
+            <a:endParaRPr lang="es-ES" sz="900" dirty="0"/>
+          </a:p>
+        </p:txBody>
+      </p:sp>
+      <p:sp>
+        <p:nvSpPr>
+          <p:cNvPr id="47" name="Shape 47"/>
+          <p:cNvSpPr txBox="1"/>
+          <p:nvPr/>
+        </p:nvSpPr>
+        <p:spPr>
+          <a:xfrm>
+            <a:off x="1078992" y="4535424"/>
+            <a:ext cx="1600200" cy="438912"/>
+          </a:xfrm>
+          <a:prstGeom prst="rect">
+            <a:avLst/>
+          </a:prstGeom>
+          <a:noFill/>
+          <a:ln>
+            <a:noFill/>
+          </a:ln>
+        </p:spPr>
+        <p:txBody>
+          <a:bodyPr wrap="square" lIns="0" tIns="0" rIns="0" bIns="0" rtlCol="0" anchor="ctr">
+            <a:noAutofit/>
+          </a:bodyPr>
+          <a:lstStyle/>
+          <a:p>
+            <a:pPr algn="l">
+              <a:lnSpc>
+                <a:spcPct val="105000"/>
+              </a:lnSpc>
+              <a:buNone/>
+            </a:pPr>
+            <a:r>
+              <a:rPr lang="es-ES" sz="1100" b="1" i="0" dirty="0">
+                <a:solidFill>
+                  <a:srgbClr val="00263A"/>
+                </a:solidFill>
+                <a:latin typeface="Montserrat"/>
+                <a:cs typeface="Montserrat"/>
+              </a:rPr>
+              <a:t>Entrega</a:t>
+            </a:r>
+            <a:endParaRPr lang="es-ES" sz="1100" dirty="0"/>
+          </a:p>
+        </p:txBody>
+      </p:sp>
+      <p:sp>
+        <p:nvSpPr>
+          <p:cNvPr id="48" name="Shape 48"/>
+          <p:cNvSpPr/>
+          <p:nvPr/>
+        </p:nvSpPr>
+        <p:spPr>
+          <a:xfrm>
+            <a:off x="2807208" y="4626864"/>
+            <a:ext cx="1371600" cy="256032"/>
+          </a:xfrm>
+          <a:prstGeom prst="roundRect">
+            <a:avLst>
+              <a:gd name="adj" fmla="val 50000"/>
+            </a:avLst>
+          </a:prstGeom>
+          <a:solidFill>
+            <a:srgbClr val="00263A"/>
+          </a:solidFill>
+          <a:ln>
+            <a:noFill/>
+          </a:ln>
+        </p:spPr>
+        <p:txBody>
+          <a:bodyPr wrap="square" lIns="0" tIns="0" rIns="0" bIns="0" rtlCol="0" anchor="ctr">
+            <a:noAutofit/>
+          </a:bodyPr>
+          <a:lstStyle/>
+          <a:p>
+            <a:pPr algn="ctr">
+              <a:lnSpc>
+                <a:spcPct val="105000"/>
+              </a:lnSpc>
+              <a:buNone/>
+            </a:pPr>
+            <a:r>
+              <a:rPr lang="es-ES" sz="750" b="1" i="0" spc="40" dirty="0">
+                <a:solidFill>
+                  <a:srgbClr val="FFFFFF"/>
+                </a:solidFill>
+                <a:latin typeface="Montserrat"/>
+                <a:cs typeface="Montserrat"/>
+              </a:rPr>
+              <a:t>IMPLANTADO</a:t>
+            </a:r>
+            <a:endParaRPr lang="es-ES" sz="750" dirty="0"/>
+          </a:p>
+        </p:txBody>
+      </p:sp>
+      <p:sp>
+        <p:nvSpPr>
+          <p:cNvPr id="49" name="Shape 49"/>
+          <p:cNvSpPr txBox="1"/>
+          <p:nvPr/>
+        </p:nvSpPr>
+        <p:spPr>
+          <a:xfrm>
+            <a:off x="4425696" y="4535424"/>
+            <a:ext cx="4434840" cy="438912"/>
+          </a:xfrm>
+          <a:prstGeom prst="rect">
+            <a:avLst/>
+          </a:prstGeom>
+          <a:noFill/>
+          <a:ln>
+            <a:noFill/>
+          </a:ln>
+        </p:spPr>
+        <p:txBody>
+          <a:bodyPr wrap="square" lIns="0" tIns="0" rIns="0" bIns="0" rtlCol="0" anchor="ctr">
+            <a:noAutofit/>
+          </a:bodyPr>
+          <a:lstStyle/>
+          <a:p>
+            <a:pPr algn="l">
+              <a:lnSpc>
+                <a:spcPct val="100000"/>
+              </a:lnSpc>
+              <a:buNone/>
+            </a:pPr>
+            <a:r>
+              <a:rPr lang="es-ES" sz="900" b="0" i="0" dirty="0">
+                <a:solidFill>
+                  <a:srgbClr val="00263A"/>
+                </a:solidFill>
+                <a:latin typeface="Montserrat"/>
+                <a:cs typeface="Montserrat"/>
+              </a:rPr>
+              <a:t>Consulta de plazos sobre la carga de capacidad de cada máquina</a:t>
+            </a:r>
+            <a:endParaRPr lang="es-ES" sz="900" dirty="0"/>
+          </a:p>
+        </p:txBody>
+      </p:sp>
+      <p:sp>
+        <p:nvSpPr>
+          <p:cNvPr id="50" name="Shape 50"/>
+          <p:cNvSpPr txBox="1"/>
+          <p:nvPr/>
+        </p:nvSpPr>
+        <p:spPr>
+          <a:xfrm>
+            <a:off x="9153144" y="4535424"/>
+            <a:ext cx="2395728" cy="438912"/>
+          </a:xfrm>
+          <a:prstGeom prst="rect">
+            <a:avLst/>
+          </a:prstGeom>
+          <a:noFill/>
+          <a:ln>
+            <a:noFill/>
+          </a:ln>
+        </p:spPr>
+        <p:txBody>
+          <a:bodyPr wrap="square" lIns="0" tIns="0" rIns="0" bIns="0" rtlCol="0" anchor="ctr">
+            <a:noAutofit/>
+          </a:bodyPr>
+          <a:lstStyle/>
+          <a:p>
+            <a:pPr algn="l">
+              <a:lnSpc>
+                <a:spcPct val="100000"/>
+              </a:lnSpc>
+              <a:buNone/>
+            </a:pPr>
+            <a:r>
+              <a:rPr lang="es-ES" sz="1000" b="0" i="0" dirty="0">
+                <a:solidFill>
+                  <a:srgbClr val="9AA9B4"/>
+                </a:solidFill>
+                <a:latin typeface="Montserrat"/>
+                <a:cs typeface="Montserrat"/>
+              </a:rPr>
+              <a:t>—</a:t>
+            </a:r>
+            <a:endParaRPr lang="es-ES" sz="1000" dirty="0"/>
+          </a:p>
+        </p:txBody>
+      </p:sp>
+      <p:sp>
+        <p:nvSpPr>
+          <p:cNvPr id="51" name="Shape 51"/>
+          <p:cNvSpPr/>
+          <p:nvPr/>
+        </p:nvSpPr>
+        <p:spPr>
+          <a:xfrm>
+            <a:off x="548640" y="5029200"/>
+            <a:ext cx="11091672" cy="438912"/>
+          </a:xfrm>
+          <a:prstGeom prst="roundRect">
+            <a:avLst>
+              <a:gd name="adj" fmla="val 12500"/>
+            </a:avLst>
+          </a:prstGeom>
+          <a:solidFill>
+            <a:srgbClr val="F5F7F8"/>
+          </a:solidFill>
+          <a:ln>
+            <a:noFill/>
+          </a:ln>
+        </p:spPr>
+        <p:txBody>
+          <a:bodyPr wrap="square" lIns="0" tIns="0" rIns="0" bIns="0" rtlCol="0" anchor="t">
+            <a:noAutofit/>
+          </a:bodyPr>
+          <a:lstStyle/>
+          <a:p>
+            <a:endParaRPr lang="es-ES" dirty="0"/>
+          </a:p>
+        </p:txBody>
+      </p:sp>
+      <p:sp>
+        <p:nvSpPr>
+          <p:cNvPr id="52" name="Shape 52"/>
+          <p:cNvSpPr/>
+          <p:nvPr/>
+        </p:nvSpPr>
+        <p:spPr>
+          <a:xfrm>
+            <a:off x="685800" y="5111496"/>
+            <a:ext cx="274320" cy="274320"/>
+          </a:xfrm>
+          <a:prstGeom prst="ellipse">
+            <a:avLst/>
+          </a:prstGeom>
+          <a:solidFill>
+            <a:srgbClr val="00263A"/>
+          </a:solidFill>
+          <a:ln>
+            <a:noFill/>
+          </a:ln>
+        </p:spPr>
+        <p:txBody>
+          <a:bodyPr wrap="square" lIns="0" tIns="0" rIns="0" bIns="0" rtlCol="0" anchor="ctr">
+            <a:noAutofit/>
+          </a:bodyPr>
+          <a:lstStyle/>
+          <a:p>
+            <a:pPr algn="ctr">
+              <a:lnSpc>
+                <a:spcPct val="105000"/>
+              </a:lnSpc>
+              <a:buNone/>
+            </a:pPr>
+            <a:r>
+              <a:rPr lang="es-ES" sz="900" b="1" i="0" dirty="0">
+                <a:solidFill>
+                  <a:srgbClr val="FFFFFF"/>
+                </a:solidFill>
+                <a:latin typeface="Montserrat"/>
+                <a:cs typeface="Montserrat"/>
+              </a:rPr>
+              <a:t>8</a:t>
+            </a:r>
+            <a:endParaRPr lang="es-ES" sz="900" dirty="0"/>
+          </a:p>
+        </p:txBody>
+      </p:sp>
+      <p:sp>
+        <p:nvSpPr>
+          <p:cNvPr id="53" name="Shape 53"/>
+          <p:cNvSpPr txBox="1"/>
+          <p:nvPr/>
+        </p:nvSpPr>
+        <p:spPr>
+          <a:xfrm>
+            <a:off x="1078992" y="5029200"/>
+            <a:ext cx="1600200" cy="438912"/>
+          </a:xfrm>
+          <a:prstGeom prst="rect">
+            <a:avLst/>
+          </a:prstGeom>
+          <a:noFill/>
+          <a:ln>
+            <a:noFill/>
+          </a:ln>
+        </p:spPr>
+        <p:txBody>
+          <a:bodyPr wrap="square" lIns="0" tIns="0" rIns="0" bIns="0" rtlCol="0" anchor="ctr">
+            <a:noAutofit/>
+          </a:bodyPr>
+          <a:lstStyle/>
+          <a:p>
+            <a:pPr algn="l">
+              <a:lnSpc>
+                <a:spcPct val="105000"/>
+              </a:lnSpc>
+              <a:buNone/>
+            </a:pPr>
+            <a:r>
+              <a:rPr lang="es-ES" sz="1100" b="1" i="0" dirty="0">
+                <a:solidFill>
+                  <a:srgbClr val="00263A"/>
+                </a:solidFill>
+                <a:latin typeface="Montserrat"/>
+                <a:cs typeface="Montserrat"/>
+              </a:rPr>
+              <a:t>Control</a:t>
+            </a:r>
+            <a:endParaRPr lang="es-ES" sz="1100" dirty="0"/>
+          </a:p>
+        </p:txBody>
+      </p:sp>
+      <p:sp>
+        <p:nvSpPr>
+          <p:cNvPr id="54" name="Shape 54"/>
+          <p:cNvSpPr/>
+          <p:nvPr/>
+        </p:nvSpPr>
+        <p:spPr>
+          <a:xfrm>
+            <a:off x="2807208" y="5120640"/>
+            <a:ext cx="1371600" cy="256032"/>
+          </a:xfrm>
+          <a:prstGeom prst="roundRect">
+            <a:avLst>
+              <a:gd name="adj" fmla="val 50000"/>
+            </a:avLst>
+          </a:prstGeom>
+          <a:solidFill>
+            <a:srgbClr val="00263A"/>
+          </a:solidFill>
+          <a:ln>
+            <a:noFill/>
+          </a:ln>
+        </p:spPr>
+        <p:txBody>
+          <a:bodyPr wrap="square" lIns="0" tIns="0" rIns="0" bIns="0" rtlCol="0" anchor="ctr">
+            <a:noAutofit/>
+          </a:bodyPr>
+          <a:lstStyle/>
+          <a:p>
+            <a:pPr algn="ctr">
+              <a:lnSpc>
+                <a:spcPct val="105000"/>
+              </a:lnSpc>
+              <a:buNone/>
+            </a:pPr>
+            <a:r>
+              <a:rPr lang="es-ES" sz="750" b="1" i="0" spc="40" dirty="0">
+                <a:solidFill>
+                  <a:srgbClr val="FFFFFF"/>
+                </a:solidFill>
+                <a:latin typeface="Montserrat"/>
+                <a:cs typeface="Montserrat"/>
+              </a:rPr>
+              <a:t>IMPLANTADO</a:t>
+            </a:r>
+            <a:endParaRPr lang="es-ES" sz="750" dirty="0"/>
+          </a:p>
+        </p:txBody>
+      </p:sp>
+      <p:sp>
+        <p:nvSpPr>
+          <p:cNvPr id="55" name="Shape 55"/>
+          <p:cNvSpPr txBox="1"/>
+          <p:nvPr/>
+        </p:nvSpPr>
+        <p:spPr>
+          <a:xfrm>
+            <a:off x="4425696" y="5029200"/>
+            <a:ext cx="4434840" cy="438912"/>
+          </a:xfrm>
+          <a:prstGeom prst="rect">
+            <a:avLst/>
+          </a:prstGeom>
+          <a:noFill/>
+          <a:ln>
+            <a:noFill/>
+          </a:ln>
+        </p:spPr>
+        <p:txBody>
+          <a:bodyPr wrap="square" lIns="0" tIns="0" rIns="0" bIns="0" rtlCol="0" anchor="ctr">
+            <a:noAutofit/>
+          </a:bodyPr>
+          <a:lstStyle/>
+          <a:p>
+            <a:pPr algn="l">
+              <a:lnSpc>
+                <a:spcPct val="100000"/>
+              </a:lnSpc>
+              <a:buNone/>
+            </a:pPr>
+            <a:r>
+              <a:rPr lang="es-ES" sz="900" b="0" i="0" dirty="0">
+                <a:solidFill>
+                  <a:srgbClr val="00263A"/>
+                </a:solidFill>
+                <a:latin typeface="Montserrat"/>
+                <a:cs typeface="Montserrat"/>
+              </a:rPr>
+              <a:t>OEE por máquina (disponibilidad, rendimiento y calidad), con propuestas según los valores reales</a:t>
+            </a:r>
+            <a:endParaRPr lang="es-ES" sz="900" dirty="0"/>
+          </a:p>
+        </p:txBody>
+      </p:sp>
+      <p:sp>
+        <p:nvSpPr>
+          <p:cNvPr id="56" name="Shape 56"/>
+          <p:cNvSpPr txBox="1"/>
+          <p:nvPr/>
+        </p:nvSpPr>
+        <p:spPr>
+          <a:xfrm>
+            <a:off x="9153144" y="5029200"/>
+            <a:ext cx="2395728" cy="438912"/>
+          </a:xfrm>
+          <a:prstGeom prst="rect">
+            <a:avLst/>
+          </a:prstGeom>
+          <a:noFill/>
+          <a:ln>
+            <a:noFill/>
+          </a:ln>
+        </p:spPr>
+        <p:txBody>
+          <a:bodyPr wrap="square" lIns="0" tIns="0" rIns="0" bIns="0" rtlCol="0" anchor="ctr">
+            <a:noAutofit/>
+          </a:bodyPr>
+          <a:lstStyle/>
+          <a:p>
+            <a:pPr algn="l">
+              <a:lnSpc>
+                <a:spcPct val="100000"/>
+              </a:lnSpc>
+              <a:buNone/>
+            </a:pPr>
+            <a:r>
+              <a:rPr lang="es-ES" sz="1000" b="0" i="0" dirty="0">
+                <a:solidFill>
+                  <a:srgbClr val="9AA9B4"/>
+                </a:solidFill>
+                <a:latin typeface="Montserrat"/>
+                <a:cs typeface="Montserrat"/>
+              </a:rPr>
+              <a:t>—</a:t>
+            </a:r>
+            <a:endParaRPr lang="es-ES" sz="1000" dirty="0"/>
+          </a:p>
+        </p:txBody>
+      </p:sp>
+      <p:sp>
+        <p:nvSpPr>
+          <p:cNvPr id="57" name="Shape 57"/>
+          <p:cNvSpPr/>
+          <p:nvPr/>
+        </p:nvSpPr>
+        <p:spPr>
+          <a:xfrm>
+            <a:off x="9015984" y="5596128"/>
+            <a:ext cx="2624328" cy="292608"/>
+          </a:xfrm>
+          <a:prstGeom prst="roundRect">
+            <a:avLst>
+              <a:gd name="adj" fmla="val 50000"/>
+            </a:avLst>
+          </a:prstGeom>
+          <a:solidFill>
+            <a:srgbClr val="FFFFFF"/>
+          </a:solidFill>
+          <a:ln w="12700">
+            <a:solidFill>
+              <a:srgbClr val="98C9EB"/>
+            </a:solidFill>
+          </a:ln>
+        </p:spPr>
+        <p:txBody>
+          <a:bodyPr wrap="square" lIns="0" tIns="0" rIns="0" bIns="0" rtlCol="0" anchor="ctr">
+            <a:noAutofit/>
+          </a:bodyPr>
+          <a:lstStyle/>
+          <a:p>
+            <a:pPr algn="ctr">
+              <a:lnSpc>
+                <a:spcPct val="105000"/>
+              </a:lnSpc>
+              <a:buNone/>
+            </a:pPr>
+            <a:r>
+              <a:rPr lang="es-ES" sz="900" b="0" i="1" dirty="0">
+                <a:solidFill>
+                  <a:srgbClr val="244C5A"/>
+                </a:solidFill>
+                <a:latin typeface="Montserrat"/>
+                <a:cs typeface="Montserrat"/>
+              </a:rPr>
+              <a:t>Proyectos 2027 en </a:t>
+            </a:r>
+            <a:r>
+              <a:rPr lang="es-ES" sz="900" b="1" i="0" dirty="0">
+                <a:solidFill>
+                  <a:srgbClr val="244C5A"/>
+                </a:solidFill>
+                <a:latin typeface="Montserrat"/>
+                <a:cs typeface="Montserrat"/>
+              </a:rPr>
+              <a:t>Anexo</a:t>
+            </a:r>
+            <a:endParaRPr lang="es-ES" sz="900" dirty="0"/>
+          </a:p>
+        </p:txBody>
+      </p:sp>
+      <p:sp>
+        <p:nvSpPr>
+          <p:cNvPr id="58" name="Shape 58"/>
+          <p:cNvSpPr txBox="1"/>
+          <p:nvPr/>
+        </p:nvSpPr>
+        <p:spPr>
+          <a:xfrm>
+            <a:off x="10424160" y="6053328"/>
+            <a:ext cx="1216152" cy="256032"/>
+          </a:xfrm>
+          <a:prstGeom prst="rect">
+            <a:avLst/>
+          </a:prstGeom>
+          <a:noFill/>
+          <a:ln>
+            <a:noFill/>
+          </a:ln>
+        </p:spPr>
+        <p:txBody>
+          <a:bodyPr wrap="square" lIns="0" tIns="0" rIns="0" bIns="0" rtlCol="0" anchor="t">
+            <a:noAutofit/>
+          </a:bodyPr>
+          <a:lstStyle/>
+          <a:p>
+            <a:pPr algn="r">
+              <a:lnSpc>
+                <a:spcPct val="105000"/>
+              </a:lnSpc>
+              <a:buNone/>
+            </a:pPr>
+            <a:r>
+              <a:rPr lang="es-ES" sz="900" b="0" i="0" dirty="0">
+                <a:solidFill>
+                  <a:srgbClr val="9AA9B4"/>
+                </a:solidFill>
+                <a:latin typeface="Montserrat"/>
+                <a:cs typeface="Montserrat"/>
+              </a:rPr>
+              <a:t>6</a:t>
+            </a:r>
+            <a:endParaRPr lang="es-ES" sz="900" dirty="0"/>
+          </a:p>
+        </p:txBody>
+      </p:sp>
+    </p:spTree>
+  </p:cSld>
+  <p:clrMapOvr>
+    <a:masterClrMapping/>
+  </p:clrMapOvr>
+</p:sld>
+</file>
+
+<file path=ppt/slides/slide11.xml><?xml version="1.0" encoding="utf-8"?>
+<p:sld xmlns:a="http://schemas.openxmlformats.org/drawingml/2006/main" xmlns:r="http://schemas.openxmlformats.org/officeDocument/2006/relationships" xmlns:p="http://schemas.openxmlformats.org/presentationml/2006/main">
+  <p:cSld>
+    <p:spTree>
+      <p:nvGrpSpPr>
+        <p:cNvPr id="1" name=""/>
+        <p:cNvGrpSpPr/>
+        <p:nvPr/>
+      </p:nvGrpSpPr>
+      <p:grpSpPr>
+        <a:xfrm>
+          <a:off x="0" y="0"/>
+          <a:ext cx="0" cy="0"/>
+          <a:chOff x="0" y="0"/>
+          <a:chExt cx="0" cy="0"/>
+        </a:xfrm>
+      </p:grpSpPr>
+      <p:sp>
+        <p:nvSpPr>
+          <p:cNvPr id="2" name="Title 2"/>
+          <p:cNvSpPr>
+            <a:spLocks noGrp="1"/>
+          </p:cNvSpPr>
+          <p:nvPr>
+            <p:ph type="title"/>
+          </p:nvPr>
+        </p:nvSpPr>
+        <p:spPr>
+          <a:xfrm>
+            <a:off x="548640" y="146304"/>
+            <a:ext cx="6766560" cy="731520"/>
+          </a:xfrm>
+        </p:spPr>
+        <p:txBody>
+          <a:bodyPr wrap="square" anchor="ctr"/>
+          <a:lstStyle/>
+          <a:p>
+            <a:pPr algn="l">
+              <a:lnSpc>
+                <a:spcPct val="105000"/>
+              </a:lnSpc>
+              <a:buNone/>
+            </a:pPr>
+            <a:r>
+              <a:rPr lang="es-ES" sz="2300" b="1" i="0" dirty="0">
+                <a:solidFill>
+                  <a:srgbClr val="FFFFFF"/>
+                </a:solidFill>
+                <a:latin typeface="Montserrat"/>
+              </a:rPr>
+              <a:t>Anexo · Proyectos 2027</a:t>
+            </a:r>
+          </a:p>
+        </p:txBody>
+      </p:sp>
+      <p:sp>
+        <p:nvSpPr>
+          <p:cNvPr id="3" name="Shape 3"/>
+          <p:cNvSpPr/>
+          <p:nvPr/>
+        </p:nvSpPr>
+        <p:spPr>
+          <a:xfrm>
+            <a:off x="7360920" y="310896"/>
+            <a:ext cx="2240280" cy="329184"/>
+          </a:xfrm>
+          <a:prstGeom prst="roundRect">
+            <a:avLst>
+              <a:gd name="adj" fmla="val 50000"/>
+            </a:avLst>
+          </a:prstGeom>
+          <a:solidFill>
+            <a:srgbClr val="98C9EB"/>
+          </a:solidFill>
+          <a:ln>
+            <a:noFill/>
+          </a:ln>
+        </p:spPr>
+        <p:txBody>
+          <a:bodyPr wrap="square" lIns="0" tIns="0" rIns="0" bIns="0" rtlCol="0" anchor="ctr">
+            <a:noAutofit/>
+          </a:bodyPr>
+          <a:lstStyle/>
+          <a:p>
+            <a:pPr algn="ctr">
+              <a:lnSpc>
+                <a:spcPct val="105000"/>
+              </a:lnSpc>
+              <a:buNone/>
+            </a:pPr>
+            <a:r>
+              <a:rPr lang="es-ES" sz="850" b="1" i="0" spc="40" dirty="0">
+                <a:solidFill>
+                  <a:srgbClr val="00263A"/>
+                </a:solidFill>
+                <a:latin typeface="Montserrat"/>
+                <a:cs typeface="Montserrat"/>
+              </a:rPr>
+              <a:t>POR VALIDAR CON NEGOCIO</a:t>
+            </a:r>
+            <a:endParaRPr lang="es-ES" sz="850" dirty="0"/>
+          </a:p>
+        </p:txBody>
+      </p:sp>
+      <p:sp>
+        <p:nvSpPr>
+          <p:cNvPr id="4" name="Shape 4"/>
+          <p:cNvSpPr/>
+          <p:nvPr/>
+        </p:nvSpPr>
+        <p:spPr>
+          <a:xfrm>
+            <a:off x="548640" y="1325880"/>
+            <a:ext cx="3544824" cy="2743200"/>
+          </a:xfrm>
+          <a:prstGeom prst="roundRect">
+            <a:avLst>
+              <a:gd name="adj" fmla="val 2666"/>
+            </a:avLst>
+          </a:prstGeom>
+          <a:solidFill>
+            <a:srgbClr val="F5F7F8"/>
+          </a:solidFill>
+          <a:ln w="9525">
+            <a:solidFill>
+              <a:srgbClr val="D7DFE5"/>
+            </a:solidFill>
+          </a:ln>
+        </p:spPr>
+        <p:txBody>
+          <a:bodyPr wrap="square" lIns="0" tIns="0" rIns="0" bIns="0" rtlCol="0" anchor="t">
+            <a:noAutofit/>
+          </a:bodyPr>
+          <a:lstStyle/>
+          <a:p>
+            <a:endParaRPr lang="es-ES" dirty="0"/>
+          </a:p>
+        </p:txBody>
+      </p:sp>
+      <p:sp>
+        <p:nvSpPr>
+          <p:cNvPr id="5" name="Shape 5"/>
+          <p:cNvSpPr/>
+          <p:nvPr/>
+        </p:nvSpPr>
+        <p:spPr>
+          <a:xfrm>
+            <a:off x="777240" y="1554480"/>
+            <a:ext cx="548640" cy="548640"/>
+          </a:xfrm>
+          <a:prstGeom prst="ellipse">
+            <a:avLst/>
+          </a:prstGeom>
+          <a:solidFill>
+            <a:srgbClr val="00263A"/>
+          </a:solidFill>
+          <a:ln>
+            <a:noFill/>
+          </a:ln>
+        </p:spPr>
+        <p:txBody>
+          <a:bodyPr wrap="square" lIns="0" tIns="0" rIns="0" bIns="0" rtlCol="0" anchor="t">
+            <a:noAutofit/>
+          </a:bodyPr>
+          <a:lstStyle/>
+          <a:p>
+            <a:endParaRPr lang="es-ES" dirty="0"/>
+          </a:p>
+        </p:txBody>
+      </p:sp>
+      <p:pic>
+        <p:nvPicPr>
+          <p:cNvPr id="6" name="Icono 6" descr="Icono globe"/>
+          <p:cNvPicPr>
+            <a:picLocks noChangeAspect="1"/>
+          </p:cNvPicPr>
+          <p:nvPr/>
+        </p:nvPicPr>
+        <p:blipFill>
+          <a:blip r:embed="rId2"/>
+          <a:stretch>
+            <a:fillRect/>
+          </a:stretch>
+        </p:blipFill>
+        <p:spPr>
+          <a:xfrm>
+            <a:off x="914400" y="1691640"/>
+            <a:ext cx="274320" cy="274320"/>
+          </a:xfrm>
+          <a:prstGeom prst="rect">
+            <a:avLst/>
+          </a:prstGeom>
+        </p:spPr>
+      </p:pic>
+      <p:sp>
+        <p:nvSpPr>
+          <p:cNvPr id="7" name="Shape 7"/>
+          <p:cNvSpPr/>
+          <p:nvPr/>
+        </p:nvSpPr>
+        <p:spPr>
+          <a:xfrm>
+            <a:off x="2767584" y="1691640"/>
+            <a:ext cx="1097280" cy="274320"/>
+          </a:xfrm>
+          <a:prstGeom prst="roundRect">
+            <a:avLst>
+              <a:gd name="adj" fmla="val 50000"/>
+            </a:avLst>
+          </a:prstGeom>
+          <a:solidFill>
+            <a:srgbClr val="98C9EB"/>
+          </a:solidFill>
+          <a:ln>
+            <a:noFill/>
+          </a:ln>
+        </p:spPr>
+        <p:txBody>
+          <a:bodyPr wrap="square" lIns="0" tIns="0" rIns="0" bIns="0" rtlCol="0" anchor="ctr">
+            <a:noAutofit/>
+          </a:bodyPr>
+          <a:lstStyle/>
+          <a:p>
+            <a:pPr algn="ctr">
+              <a:lnSpc>
+                <a:spcPct val="105000"/>
+              </a:lnSpc>
+              <a:buNone/>
+            </a:pPr>
+            <a:r>
+              <a:rPr lang="es-ES" sz="750" b="1" i="0" spc="40" dirty="0">
+                <a:solidFill>
+                  <a:srgbClr val="00263A"/>
+                </a:solidFill>
+                <a:latin typeface="Montserrat"/>
+                <a:cs typeface="Montserrat"/>
+              </a:rPr>
+              <a:t>ONDUPACK</a:t>
+            </a:r>
+            <a:endParaRPr lang="es-ES" sz="750" dirty="0"/>
+          </a:p>
+        </p:txBody>
+      </p:sp>
+      <p:sp>
+        <p:nvSpPr>
+          <p:cNvPr id="8" name="Shape 8"/>
+          <p:cNvSpPr/>
+          <p:nvPr/>
+        </p:nvSpPr>
+        <p:spPr>
+          <a:xfrm>
+            <a:off x="1578864" y="1691640"/>
+            <a:ext cx="1097280" cy="274320"/>
+          </a:xfrm>
+          <a:prstGeom prst="roundRect">
+            <a:avLst>
+              <a:gd name="adj" fmla="val 50000"/>
+            </a:avLst>
+          </a:prstGeom>
+          <a:solidFill>
+            <a:srgbClr val="98C9EB"/>
+          </a:solidFill>
+          <a:ln>
+            <a:noFill/>
+          </a:ln>
+        </p:spPr>
+        <p:txBody>
+          <a:bodyPr wrap="square" lIns="0" tIns="0" rIns="0" bIns="0" rtlCol="0" anchor="ctr">
+            <a:noAutofit/>
+          </a:bodyPr>
+          <a:lstStyle/>
+          <a:p>
+            <a:pPr algn="ctr">
+              <a:lnSpc>
+                <a:spcPct val="105000"/>
+              </a:lnSpc>
+              <a:buNone/>
+            </a:pPr>
+            <a:r>
+              <a:rPr lang="es-ES" sz="750" b="1" i="0" spc="40" dirty="0">
+                <a:solidFill>
+                  <a:srgbClr val="00263A"/>
+                </a:solidFill>
+                <a:latin typeface="Montserrat"/>
+                <a:cs typeface="Montserrat"/>
+              </a:rPr>
+              <a:t>ONDUPET</a:t>
+            </a:r>
+            <a:endParaRPr lang="es-ES" sz="750" dirty="0"/>
+          </a:p>
+        </p:txBody>
+      </p:sp>
+      <p:sp>
+        <p:nvSpPr>
+          <p:cNvPr id="9" name="Shape 9"/>
+          <p:cNvSpPr txBox="1"/>
+          <p:nvPr/>
+        </p:nvSpPr>
+        <p:spPr>
+          <a:xfrm>
+            <a:off x="777240" y="2240280"/>
+            <a:ext cx="3087624" cy="320040"/>
+          </a:xfrm>
+          <a:prstGeom prst="rect">
+            <a:avLst/>
+          </a:prstGeom>
+          <a:noFill/>
+          <a:ln>
+            <a:noFill/>
+          </a:ln>
+        </p:spPr>
+        <p:txBody>
+          <a:bodyPr wrap="square" lIns="0" tIns="0" rIns="0" bIns="0" rtlCol="0" anchor="ctr">
+            <a:noAutofit/>
+          </a:bodyPr>
+          <a:lstStyle/>
+          <a:p>
+            <a:pPr algn="l">
+              <a:lnSpc>
+                <a:spcPct val="105000"/>
+              </a:lnSpc>
+              <a:buNone/>
+            </a:pPr>
+            <a:r>
+              <a:rPr lang="es-ES" sz="1350" b="1" i="0" dirty="0">
+                <a:solidFill>
+                  <a:srgbClr val="00263A"/>
+                </a:solidFill>
+                <a:latin typeface="Montserrat"/>
+                <a:cs typeface="Montserrat"/>
+              </a:rPr>
+              <a:t>Migración a aplicación web</a:t>
+            </a:r>
+            <a:endParaRPr lang="es-ES" sz="1350" dirty="0"/>
+          </a:p>
+        </p:txBody>
+      </p:sp>
+      <p:sp>
+        <p:nvSpPr>
+          <p:cNvPr id="10" name="Shape 10"/>
+          <p:cNvSpPr txBox="1"/>
+          <p:nvPr/>
+        </p:nvSpPr>
+        <p:spPr>
+          <a:xfrm>
+            <a:off x="777240" y="2651760"/>
+            <a:ext cx="3087624" cy="201168"/>
+          </a:xfrm>
+          <a:prstGeom prst="rect">
+            <a:avLst/>
+          </a:prstGeom>
+          <a:noFill/>
+          <a:ln>
+            <a:noFill/>
+          </a:ln>
+        </p:spPr>
+        <p:txBody>
+          <a:bodyPr wrap="square" lIns="0" tIns="0" rIns="0" bIns="0" rtlCol="0" anchor="t">
+            <a:noAutofit/>
+          </a:bodyPr>
+          <a:lstStyle/>
+          <a:p>
+            <a:pPr algn="l">
+              <a:lnSpc>
+                <a:spcPct val="105000"/>
+              </a:lnSpc>
+              <a:buNone/>
+            </a:pPr>
+            <a:r>
+              <a:rPr lang="es-ES" sz="800" b="1" i="0" spc="120" dirty="0">
+                <a:solidFill>
+                  <a:srgbClr val="244C5A"/>
+                </a:solidFill>
+                <a:latin typeface="Montserrat"/>
+                <a:cs typeface="Montserrat"/>
+              </a:rPr>
+              <a:t>QUÉ ES</a:t>
+            </a:r>
+            <a:endParaRPr lang="es-ES" sz="800" dirty="0"/>
+          </a:p>
+        </p:txBody>
+      </p:sp>
+      <p:sp>
+        <p:nvSpPr>
+          <p:cNvPr id="11" name="Shape 11"/>
+          <p:cNvSpPr txBox="1"/>
+          <p:nvPr/>
+        </p:nvSpPr>
+        <p:spPr>
+          <a:xfrm>
+            <a:off x="777240" y="2862072"/>
+            <a:ext cx="3087624" cy="457200"/>
+          </a:xfrm>
+          <a:prstGeom prst="rect">
+            <a:avLst/>
+          </a:prstGeom>
+          <a:noFill/>
+          <a:ln>
+            <a:noFill/>
+          </a:ln>
+        </p:spPr>
+        <p:txBody>
+          <a:bodyPr wrap="square" lIns="0" tIns="0" rIns="0" bIns="0" rtlCol="0" anchor="t">
+            <a:noAutofit/>
+          </a:bodyPr>
+          <a:lstStyle/>
+          <a:p>
+            <a:pPr algn="l">
+              <a:lnSpc>
+                <a:spcPct val="110000"/>
+              </a:lnSpc>
+              <a:buNone/>
+            </a:pPr>
+            <a:r>
+              <a:rPr lang="es-ES" sz="950" b="0" i="0" dirty="0">
+                <a:solidFill>
+                  <a:srgbClr val="00263A"/>
+                </a:solidFill>
+                <a:latin typeface="Montserrat"/>
+                <a:cs typeface="Montserrat"/>
+              </a:rPr>
+              <a:t>Pasar las pantallas de planificación de la aplicación de escritorio a una aplicación web.</a:t>
+            </a:r>
+            <a:endParaRPr lang="es-ES" sz="950" dirty="0"/>
+          </a:p>
+        </p:txBody>
+      </p:sp>
+      <p:sp>
+        <p:nvSpPr>
+          <p:cNvPr id="12" name="Shape 12"/>
+          <p:cNvSpPr txBox="1"/>
+          <p:nvPr/>
+        </p:nvSpPr>
+        <p:spPr>
+          <a:xfrm>
+            <a:off x="777240" y="3337560"/>
+            <a:ext cx="3087624" cy="201168"/>
+          </a:xfrm>
+          <a:prstGeom prst="rect">
+            <a:avLst/>
+          </a:prstGeom>
+          <a:noFill/>
+          <a:ln>
+            <a:noFill/>
+          </a:ln>
+        </p:spPr>
+        <p:txBody>
+          <a:bodyPr wrap="square" lIns="0" tIns="0" rIns="0" bIns="0" rtlCol="0" anchor="t">
+            <a:noAutofit/>
+          </a:bodyPr>
+          <a:lstStyle/>
+          <a:p>
+            <a:pPr algn="l">
+              <a:lnSpc>
+                <a:spcPct val="105000"/>
+              </a:lnSpc>
+              <a:buNone/>
+            </a:pPr>
+            <a:r>
+              <a:rPr lang="es-ES" sz="800" b="1" i="0" spc="120" dirty="0">
+                <a:solidFill>
+                  <a:srgbClr val="244C5A"/>
+                </a:solidFill>
+                <a:latin typeface="Montserrat"/>
+                <a:cs typeface="Montserrat"/>
+              </a:rPr>
+              <a:t>QUÉ APORTA</a:t>
+            </a:r>
+            <a:endParaRPr lang="es-ES" sz="800" dirty="0"/>
+          </a:p>
+        </p:txBody>
+      </p:sp>
+      <p:sp>
+        <p:nvSpPr>
+          <p:cNvPr id="13" name="Shape 13"/>
+          <p:cNvSpPr txBox="1"/>
+          <p:nvPr/>
+        </p:nvSpPr>
+        <p:spPr>
+          <a:xfrm>
+            <a:off x="777240" y="3538728"/>
+            <a:ext cx="3087624" cy="411480"/>
+          </a:xfrm>
+          <a:prstGeom prst="rect">
+            <a:avLst/>
+          </a:prstGeom>
+          <a:noFill/>
+          <a:ln>
+            <a:noFill/>
+          </a:ln>
+        </p:spPr>
+        <p:txBody>
+          <a:bodyPr wrap="square" lIns="0" tIns="0" rIns="0" bIns="0" rtlCol="0" anchor="t">
+            <a:noAutofit/>
+          </a:bodyPr>
+          <a:lstStyle/>
+          <a:p>
+            <a:pPr algn="l">
+              <a:lnSpc>
+                <a:spcPct val="110000"/>
+              </a:lnSpc>
+              <a:buNone/>
+            </a:pPr>
+            <a:r>
+              <a:rPr lang="es-ES" sz="950" b="1" i="0" dirty="0">
+                <a:solidFill>
+                  <a:srgbClr val="00263A"/>
+                </a:solidFill>
+                <a:latin typeface="Montserrat"/>
+                <a:cs typeface="Montserrat"/>
+              </a:rPr>
+              <a:t>Acceso desde el navegador y un despliegue más sencillo, con una base común para las plantas.</a:t>
+            </a:r>
+            <a:endParaRPr lang="es-ES" sz="950" dirty="0"/>
+          </a:p>
+        </p:txBody>
+      </p:sp>
+      <p:sp>
+        <p:nvSpPr>
+          <p:cNvPr id="14" name="Shape 14"/>
+          <p:cNvSpPr/>
+          <p:nvPr/>
+        </p:nvSpPr>
+        <p:spPr>
+          <a:xfrm>
+            <a:off x="4322064" y="1325880"/>
+            <a:ext cx="3544824" cy="2743200"/>
+          </a:xfrm>
+          <a:prstGeom prst="roundRect">
+            <a:avLst>
+              <a:gd name="adj" fmla="val 2666"/>
+            </a:avLst>
+          </a:prstGeom>
+          <a:solidFill>
+            <a:srgbClr val="F5F7F8"/>
+          </a:solidFill>
+          <a:ln w="9525">
+            <a:solidFill>
+              <a:srgbClr val="D7DFE5"/>
+            </a:solidFill>
+          </a:ln>
+        </p:spPr>
+        <p:txBody>
+          <a:bodyPr wrap="square" lIns="0" tIns="0" rIns="0" bIns="0" rtlCol="0" anchor="t">
+            <a:noAutofit/>
+          </a:bodyPr>
+          <a:lstStyle/>
+          <a:p>
+            <a:endParaRPr lang="es-ES" dirty="0"/>
+          </a:p>
+        </p:txBody>
+      </p:sp>
+      <p:sp>
+        <p:nvSpPr>
+          <p:cNvPr id="15" name="Shape 15"/>
+          <p:cNvSpPr/>
+          <p:nvPr/>
+        </p:nvSpPr>
+        <p:spPr>
+          <a:xfrm>
+            <a:off x="4550664" y="1554480"/>
+            <a:ext cx="548640" cy="548640"/>
+          </a:xfrm>
+          <a:prstGeom prst="ellipse">
+            <a:avLst/>
+          </a:prstGeom>
+          <a:solidFill>
+            <a:srgbClr val="00263A"/>
+          </a:solidFill>
+          <a:ln>
+            <a:noFill/>
+          </a:ln>
+        </p:spPr>
+        <p:txBody>
+          <a:bodyPr wrap="square" lIns="0" tIns="0" rIns="0" bIns="0" rtlCol="0" anchor="t">
+            <a:noAutofit/>
+          </a:bodyPr>
+          <a:lstStyle/>
+          <a:p>
+            <a:endParaRPr lang="es-ES" dirty="0"/>
+          </a:p>
+        </p:txBody>
+      </p:sp>
+      <p:pic>
+        <p:nvPicPr>
+          <p:cNvPr id="16" name="Icono 16" descr="Icono puzzle"/>
+          <p:cNvPicPr>
+            <a:picLocks noChangeAspect="1"/>
+          </p:cNvPicPr>
+          <p:nvPr/>
+        </p:nvPicPr>
+        <p:blipFill>
+          <a:blip r:embed="rId3"/>
+          <a:stretch>
+            <a:fillRect/>
+          </a:stretch>
+        </p:blipFill>
+        <p:spPr>
+          <a:xfrm>
+            <a:off x="4687824" y="1691640"/>
+            <a:ext cx="274320" cy="274320"/>
+          </a:xfrm>
+          <a:prstGeom prst="rect">
+            <a:avLst/>
+          </a:prstGeom>
+        </p:spPr>
+      </p:pic>
+      <p:sp>
+        <p:nvSpPr>
+          <p:cNvPr id="17" name="Shape 17"/>
+          <p:cNvSpPr/>
+          <p:nvPr/>
+        </p:nvSpPr>
+        <p:spPr>
+          <a:xfrm>
+            <a:off x="6541008" y="1691640"/>
+            <a:ext cx="1097280" cy="274320"/>
+          </a:xfrm>
+          <a:prstGeom prst="roundRect">
+            <a:avLst>
+              <a:gd name="adj" fmla="val 50000"/>
+            </a:avLst>
+          </a:prstGeom>
+          <a:solidFill>
+            <a:srgbClr val="98C9EB"/>
+          </a:solidFill>
+          <a:ln>
+            <a:noFill/>
+          </a:ln>
+        </p:spPr>
+        <p:txBody>
+          <a:bodyPr wrap="square" lIns="0" tIns="0" rIns="0" bIns="0" rtlCol="0" anchor="ctr">
+            <a:noAutofit/>
+          </a:bodyPr>
+          <a:lstStyle/>
+          <a:p>
+            <a:pPr algn="ctr">
+              <a:lnSpc>
+                <a:spcPct val="105000"/>
+              </a:lnSpc>
+              <a:buNone/>
+            </a:pPr>
+            <a:r>
+              <a:rPr lang="es-ES" sz="750" b="1" i="0" spc="40" dirty="0">
+                <a:solidFill>
+                  <a:srgbClr val="00263A"/>
+                </a:solidFill>
+                <a:latin typeface="Montserrat"/>
+                <a:cs typeface="Montserrat"/>
+              </a:rPr>
+              <a:t>ONDUPACK</a:t>
+            </a:r>
+            <a:endParaRPr lang="es-ES" sz="750" dirty="0"/>
+          </a:p>
+        </p:txBody>
+      </p:sp>
+      <p:sp>
+        <p:nvSpPr>
+          <p:cNvPr id="18" name="Shape 18"/>
+          <p:cNvSpPr txBox="1"/>
+          <p:nvPr/>
+        </p:nvSpPr>
+        <p:spPr>
+          <a:xfrm>
+            <a:off x="4550664" y="2240280"/>
+            <a:ext cx="3087624" cy="320040"/>
+          </a:xfrm>
+          <a:prstGeom prst="rect">
+            <a:avLst/>
+          </a:prstGeom>
+          <a:noFill/>
+          <a:ln>
+            <a:noFill/>
+          </a:ln>
+        </p:spPr>
+        <p:txBody>
+          <a:bodyPr wrap="square" lIns="0" tIns="0" rIns="0" bIns="0" rtlCol="0" anchor="ctr">
+            <a:noAutofit/>
+          </a:bodyPr>
+          <a:lstStyle/>
+          <a:p>
+            <a:pPr algn="l">
+              <a:lnSpc>
+                <a:spcPct val="105000"/>
+              </a:lnSpc>
+              <a:buNone/>
+            </a:pPr>
+            <a:r>
+              <a:rPr lang="es-ES" sz="1350" b="1" i="0" dirty="0">
+                <a:solidFill>
+                  <a:srgbClr val="00263A"/>
+                </a:solidFill>
+                <a:latin typeface="Montserrat"/>
+                <a:cs typeface="Montserrat"/>
+              </a:rPr>
+              <a:t>Algoritmo de combinación</a:t>
+            </a:r>
+            <a:endParaRPr lang="es-ES" sz="1350" dirty="0"/>
+          </a:p>
+        </p:txBody>
+      </p:sp>
+      <p:sp>
+        <p:nvSpPr>
+          <p:cNvPr id="19" name="Shape 19"/>
+          <p:cNvSpPr txBox="1"/>
+          <p:nvPr/>
+        </p:nvSpPr>
+        <p:spPr>
+          <a:xfrm>
+            <a:off x="4550664" y="2651760"/>
+            <a:ext cx="3087624" cy="201168"/>
+          </a:xfrm>
+          <a:prstGeom prst="rect">
+            <a:avLst/>
+          </a:prstGeom>
+          <a:noFill/>
+          <a:ln>
+            <a:noFill/>
+          </a:ln>
+        </p:spPr>
+        <p:txBody>
+          <a:bodyPr wrap="square" lIns="0" tIns="0" rIns="0" bIns="0" rtlCol="0" anchor="t">
+            <a:noAutofit/>
+          </a:bodyPr>
+          <a:lstStyle/>
+          <a:p>
+            <a:pPr algn="l">
+              <a:lnSpc>
+                <a:spcPct val="105000"/>
+              </a:lnSpc>
+              <a:buNone/>
+            </a:pPr>
+            <a:r>
+              <a:rPr lang="es-ES" sz="800" b="1" i="0" spc="120" dirty="0">
+                <a:solidFill>
+                  <a:srgbClr val="244C5A"/>
+                </a:solidFill>
+                <a:latin typeface="Montserrat"/>
+                <a:cs typeface="Montserrat"/>
+              </a:rPr>
+              <a:t>QUÉ ES</a:t>
+            </a:r>
+            <a:endParaRPr lang="es-ES" sz="800" dirty="0"/>
+          </a:p>
+        </p:txBody>
+      </p:sp>
+      <p:sp>
+        <p:nvSpPr>
+          <p:cNvPr id="20" name="Shape 20"/>
+          <p:cNvSpPr txBox="1"/>
+          <p:nvPr/>
+        </p:nvSpPr>
+        <p:spPr>
+          <a:xfrm>
+            <a:off x="4550664" y="2862072"/>
+            <a:ext cx="3087624" cy="457200"/>
+          </a:xfrm>
+          <a:prstGeom prst="rect">
+            <a:avLst/>
+          </a:prstGeom>
+          <a:noFill/>
+          <a:ln>
+            <a:noFill/>
+          </a:ln>
+        </p:spPr>
+        <p:txBody>
+          <a:bodyPr wrap="square" lIns="0" tIns="0" rIns="0" bIns="0" rtlCol="0" anchor="t">
+            <a:noAutofit/>
+          </a:bodyPr>
+          <a:lstStyle/>
+          <a:p>
+            <a:pPr algn="l">
+              <a:lnSpc>
+                <a:spcPct val="110000"/>
+              </a:lnSpc>
+              <a:buNone/>
+            </a:pPr>
+            <a:r>
+              <a:rPr lang="es-ES" sz="950" b="0" i="0" dirty="0">
+                <a:solidFill>
+                  <a:srgbClr val="00263A"/>
+                </a:solidFill>
+                <a:latin typeface="Montserrat"/>
+                <a:cs typeface="Montserrat"/>
+              </a:rPr>
+              <a:t>Combinación automática de pedidos que mejora la planificación sin intervención manual.</a:t>
+            </a:r>
+            <a:endParaRPr lang="es-ES" sz="950" dirty="0"/>
+          </a:p>
+        </p:txBody>
+      </p:sp>
+      <p:sp>
+        <p:nvSpPr>
+          <p:cNvPr id="21" name="Shape 21"/>
+          <p:cNvSpPr txBox="1"/>
+          <p:nvPr/>
+        </p:nvSpPr>
+        <p:spPr>
+          <a:xfrm>
+            <a:off x="4550664" y="3337560"/>
+            <a:ext cx="3087624" cy="201168"/>
+          </a:xfrm>
+          <a:prstGeom prst="rect">
+            <a:avLst/>
+          </a:prstGeom>
+          <a:noFill/>
+          <a:ln>
+            <a:noFill/>
+          </a:ln>
+        </p:spPr>
+        <p:txBody>
+          <a:bodyPr wrap="square" lIns="0" tIns="0" rIns="0" bIns="0" rtlCol="0" anchor="t">
+            <a:noAutofit/>
+          </a:bodyPr>
+          <a:lstStyle/>
+          <a:p>
+            <a:pPr algn="l">
+              <a:lnSpc>
+                <a:spcPct val="105000"/>
+              </a:lnSpc>
+              <a:buNone/>
+            </a:pPr>
+            <a:r>
+              <a:rPr lang="es-ES" sz="800" b="1" i="0" spc="120" dirty="0">
+                <a:solidFill>
+                  <a:srgbClr val="244C5A"/>
+                </a:solidFill>
+                <a:latin typeface="Montserrat"/>
+                <a:cs typeface="Montserrat"/>
+              </a:rPr>
+              <a:t>QUÉ APORTA</a:t>
+            </a:r>
+            <a:endParaRPr lang="es-ES" sz="800" dirty="0"/>
+          </a:p>
+        </p:txBody>
+      </p:sp>
+      <p:sp>
+        <p:nvSpPr>
+          <p:cNvPr id="22" name="Shape 22"/>
+          <p:cNvSpPr txBox="1"/>
+          <p:nvPr/>
+        </p:nvSpPr>
+        <p:spPr>
+          <a:xfrm>
+            <a:off x="4550664" y="3538728"/>
+            <a:ext cx="3087624" cy="411480"/>
+          </a:xfrm>
+          <a:prstGeom prst="rect">
+            <a:avLst/>
+          </a:prstGeom>
+          <a:noFill/>
+          <a:ln>
+            <a:noFill/>
+          </a:ln>
+        </p:spPr>
+        <p:txBody>
+          <a:bodyPr wrap="square" lIns="0" tIns="0" rIns="0" bIns="0" rtlCol="0" anchor="t">
+            <a:noAutofit/>
+          </a:bodyPr>
+          <a:lstStyle/>
+          <a:p>
+            <a:pPr algn="l">
+              <a:lnSpc>
+                <a:spcPct val="110000"/>
+              </a:lnSpc>
+              <a:buNone/>
+            </a:pPr>
+            <a:r>
+              <a:rPr lang="es-ES" sz="950" b="1" i="0" dirty="0">
+                <a:solidFill>
+                  <a:srgbClr val="00263A"/>
+                </a:solidFill>
+                <a:latin typeface="Montserrat"/>
+                <a:cs typeface="Montserrat"/>
+              </a:rPr>
+              <a:t>Mejores combinaciones en menos tiempo y menos trabajo manual en Combiplan.</a:t>
+            </a:r>
+            <a:endParaRPr lang="es-ES" sz="950" dirty="0"/>
+          </a:p>
+        </p:txBody>
+      </p:sp>
+      <p:sp>
+        <p:nvSpPr>
+          <p:cNvPr id="23" name="Shape 23"/>
+          <p:cNvSpPr/>
+          <p:nvPr/>
+        </p:nvSpPr>
+        <p:spPr>
+          <a:xfrm>
+            <a:off x="8095488" y="1325880"/>
+            <a:ext cx="3544824" cy="2743200"/>
+          </a:xfrm>
+          <a:prstGeom prst="roundRect">
+            <a:avLst>
+              <a:gd name="adj" fmla="val 2666"/>
+            </a:avLst>
+          </a:prstGeom>
+          <a:solidFill>
+            <a:srgbClr val="F5F7F8"/>
+          </a:solidFill>
+          <a:ln w="9525">
+            <a:solidFill>
+              <a:srgbClr val="D7DFE5"/>
+            </a:solidFill>
+          </a:ln>
+        </p:spPr>
+        <p:txBody>
+          <a:bodyPr wrap="square" lIns="0" tIns="0" rIns="0" bIns="0" rtlCol="0" anchor="t">
+            <a:noAutofit/>
+          </a:bodyPr>
+          <a:lstStyle/>
+          <a:p>
+            <a:endParaRPr lang="es-ES" dirty="0"/>
+          </a:p>
+        </p:txBody>
+      </p:sp>
+      <p:sp>
+        <p:nvSpPr>
+          <p:cNvPr id="24" name="Shape 24"/>
+          <p:cNvSpPr/>
+          <p:nvPr/>
+        </p:nvSpPr>
+        <p:spPr>
+          <a:xfrm>
+            <a:off x="8324088" y="1554480"/>
+            <a:ext cx="548640" cy="548640"/>
+          </a:xfrm>
+          <a:prstGeom prst="ellipse">
+            <a:avLst/>
+          </a:prstGeom>
+          <a:solidFill>
+            <a:srgbClr val="00263A"/>
+          </a:solidFill>
+          <a:ln>
+            <a:noFill/>
+          </a:ln>
+        </p:spPr>
+        <p:txBody>
+          <a:bodyPr wrap="square" lIns="0" tIns="0" rIns="0" bIns="0" rtlCol="0" anchor="t">
+            <a:noAutofit/>
+          </a:bodyPr>
+          <a:lstStyle/>
+          <a:p>
+            <a:endParaRPr lang="es-ES" dirty="0"/>
+          </a:p>
+        </p:txBody>
+      </p:sp>
+      <p:pic>
+        <p:nvPicPr>
+          <p:cNvPr id="25" name="Icono 25" descr="Icono usersclock"/>
+          <p:cNvPicPr>
+            <a:picLocks noChangeAspect="1"/>
+          </p:cNvPicPr>
+          <p:nvPr/>
+        </p:nvPicPr>
+        <p:blipFill>
+          <a:blip r:embed="rId4"/>
+          <a:stretch>
+            <a:fillRect/>
+          </a:stretch>
+        </p:blipFill>
+        <p:spPr>
+          <a:xfrm>
+            <a:off x="8461248" y="1691640"/>
+            <a:ext cx="274320" cy="274320"/>
+          </a:xfrm>
+          <a:prstGeom prst="rect">
+            <a:avLst/>
+          </a:prstGeom>
+        </p:spPr>
+      </p:pic>
+      <p:sp>
+        <p:nvSpPr>
+          <p:cNvPr id="26" name="Shape 26"/>
+          <p:cNvSpPr/>
+          <p:nvPr/>
+        </p:nvSpPr>
+        <p:spPr>
+          <a:xfrm>
+            <a:off x="10314432" y="1691640"/>
+            <a:ext cx="1097280" cy="274320"/>
+          </a:xfrm>
+          <a:prstGeom prst="roundRect">
+            <a:avLst>
+              <a:gd name="adj" fmla="val 50000"/>
+            </a:avLst>
+          </a:prstGeom>
+          <a:solidFill>
+            <a:srgbClr val="98C9EB"/>
+          </a:solidFill>
+          <a:ln>
+            <a:noFill/>
+          </a:ln>
+        </p:spPr>
+        <p:txBody>
+          <a:bodyPr wrap="square" lIns="0" tIns="0" rIns="0" bIns="0" rtlCol="0" anchor="ctr">
+            <a:noAutofit/>
+          </a:bodyPr>
+          <a:lstStyle/>
+          <a:p>
+            <a:pPr algn="ctr">
+              <a:lnSpc>
+                <a:spcPct val="105000"/>
+              </a:lnSpc>
+              <a:buNone/>
+            </a:pPr>
+            <a:r>
+              <a:rPr lang="es-ES" sz="750" b="1" i="0" spc="40" dirty="0">
+                <a:solidFill>
+                  <a:srgbClr val="00263A"/>
+                </a:solidFill>
+                <a:latin typeface="Montserrat"/>
+                <a:cs typeface="Montserrat"/>
+              </a:rPr>
+              <a:t>ONDUPET</a:t>
+            </a:r>
+            <a:endParaRPr lang="es-ES" sz="750" dirty="0"/>
+          </a:p>
+        </p:txBody>
+      </p:sp>
+      <p:sp>
+        <p:nvSpPr>
+          <p:cNvPr id="27" name="Shape 27"/>
+          <p:cNvSpPr txBox="1"/>
+          <p:nvPr/>
+        </p:nvSpPr>
+        <p:spPr>
+          <a:xfrm>
+            <a:off x="8324088" y="2240280"/>
+            <a:ext cx="3087624" cy="320040"/>
+          </a:xfrm>
+          <a:prstGeom prst="rect">
+            <a:avLst/>
+          </a:prstGeom>
+          <a:noFill/>
+          <a:ln>
+            <a:noFill/>
+          </a:ln>
+        </p:spPr>
+        <p:txBody>
+          <a:bodyPr wrap="square" lIns="0" tIns="0" rIns="0" bIns="0" rtlCol="0" anchor="ctr">
+            <a:noAutofit/>
+          </a:bodyPr>
+          <a:lstStyle/>
+          <a:p>
+            <a:pPr algn="l">
+              <a:lnSpc>
+                <a:spcPct val="105000"/>
+              </a:lnSpc>
+              <a:buNone/>
+            </a:pPr>
+            <a:r>
+              <a:rPr lang="es-ES" sz="1350" b="1" i="0" dirty="0">
+                <a:solidFill>
+                  <a:srgbClr val="00263A"/>
+                </a:solidFill>
+                <a:latin typeface="Montserrat"/>
+                <a:cs typeface="Montserrat"/>
+              </a:rPr>
+              <a:t>PRAE</a:t>
+            </a:r>
+            <a:endParaRPr lang="es-ES" sz="1350" dirty="0"/>
+          </a:p>
+        </p:txBody>
+      </p:sp>
+      <p:sp>
+        <p:nvSpPr>
+          <p:cNvPr id="28" name="Shape 28"/>
+          <p:cNvSpPr txBox="1"/>
+          <p:nvPr/>
+        </p:nvSpPr>
+        <p:spPr>
+          <a:xfrm>
+            <a:off x="8324088" y="2651760"/>
+            <a:ext cx="3087624" cy="201168"/>
+          </a:xfrm>
+          <a:prstGeom prst="rect">
+            <a:avLst/>
+          </a:prstGeom>
+          <a:noFill/>
+          <a:ln>
+            <a:noFill/>
+          </a:ln>
+        </p:spPr>
+        <p:txBody>
+          <a:bodyPr wrap="square" lIns="0" tIns="0" rIns="0" bIns="0" rtlCol="0" anchor="t">
+            <a:noAutofit/>
+          </a:bodyPr>
+          <a:lstStyle/>
+          <a:p>
+            <a:pPr algn="l">
+              <a:lnSpc>
+                <a:spcPct val="105000"/>
+              </a:lnSpc>
+              <a:buNone/>
+            </a:pPr>
+            <a:r>
+              <a:rPr lang="es-ES" sz="800" b="1" i="0" spc="120" dirty="0">
+                <a:solidFill>
+                  <a:srgbClr val="244C5A"/>
+                </a:solidFill>
+                <a:latin typeface="Montserrat"/>
+                <a:cs typeface="Montserrat"/>
+              </a:rPr>
+              <a:t>QUÉ ES</a:t>
+            </a:r>
+            <a:endParaRPr lang="es-ES" sz="800" dirty="0"/>
+          </a:p>
+        </p:txBody>
+      </p:sp>
+      <p:sp>
+        <p:nvSpPr>
+          <p:cNvPr id="29" name="Shape 29"/>
+          <p:cNvSpPr txBox="1"/>
+          <p:nvPr/>
+        </p:nvSpPr>
+        <p:spPr>
+          <a:xfrm>
+            <a:off x="8324088" y="2862072"/>
+            <a:ext cx="3087624" cy="457200"/>
+          </a:xfrm>
+          <a:prstGeom prst="rect">
+            <a:avLst/>
+          </a:prstGeom>
+          <a:noFill/>
+          <a:ln>
+            <a:noFill/>
+          </a:ln>
+        </p:spPr>
+        <p:txBody>
+          <a:bodyPr wrap="square" lIns="0" tIns="0" rIns="0" bIns="0" rtlCol="0" anchor="t">
+            <a:noAutofit/>
+          </a:bodyPr>
+          <a:lstStyle/>
+          <a:p>
+            <a:pPr algn="l">
+              <a:lnSpc>
+                <a:spcPct val="110000"/>
+              </a:lnSpc>
+              <a:buNone/>
+            </a:pPr>
+            <a:r>
+              <a:rPr lang="es-ES" sz="950" b="0" i="0" dirty="0">
+                <a:solidFill>
+                  <a:srgbClr val="00263A"/>
+                </a:solidFill>
+                <a:latin typeface="Montserrat"/>
+                <a:cs typeface="Montserrat"/>
+              </a:rPr>
+              <a:t>Asignación de personas, con nombre y apellidos, a turnos y máquinas.</a:t>
+            </a:r>
+            <a:endParaRPr lang="es-ES" sz="950" dirty="0"/>
+          </a:p>
+        </p:txBody>
+      </p:sp>
+      <p:sp>
+        <p:nvSpPr>
+          <p:cNvPr id="30" name="Shape 30"/>
+          <p:cNvSpPr txBox="1"/>
+          <p:nvPr/>
+        </p:nvSpPr>
+        <p:spPr>
+          <a:xfrm>
+            <a:off x="8324088" y="3337560"/>
+            <a:ext cx="3087624" cy="201168"/>
+          </a:xfrm>
+          <a:prstGeom prst="rect">
+            <a:avLst/>
+          </a:prstGeom>
+          <a:noFill/>
+          <a:ln>
+            <a:noFill/>
+          </a:ln>
+        </p:spPr>
+        <p:txBody>
+          <a:bodyPr wrap="square" lIns="0" tIns="0" rIns="0" bIns="0" rtlCol="0" anchor="t">
+            <a:noAutofit/>
+          </a:bodyPr>
+          <a:lstStyle/>
+          <a:p>
+            <a:pPr algn="l">
+              <a:lnSpc>
+                <a:spcPct val="105000"/>
+              </a:lnSpc>
+              <a:buNone/>
+            </a:pPr>
+            <a:r>
+              <a:rPr lang="es-ES" sz="800" b="1" i="0" spc="120" dirty="0">
+                <a:solidFill>
+                  <a:srgbClr val="244C5A"/>
+                </a:solidFill>
+                <a:latin typeface="Montserrat"/>
+                <a:cs typeface="Montserrat"/>
+              </a:rPr>
+              <a:t>QUÉ APORTA</a:t>
+            </a:r>
+            <a:endParaRPr lang="es-ES" sz="800" dirty="0"/>
+          </a:p>
+        </p:txBody>
+      </p:sp>
+      <p:sp>
+        <p:nvSpPr>
+          <p:cNvPr id="31" name="Shape 31"/>
+          <p:cNvSpPr txBox="1"/>
+          <p:nvPr/>
+        </p:nvSpPr>
+        <p:spPr>
+          <a:xfrm>
+            <a:off x="8324088" y="3538728"/>
+            <a:ext cx="3087624" cy="411480"/>
+          </a:xfrm>
+          <a:prstGeom prst="rect">
+            <a:avLst/>
+          </a:prstGeom>
+          <a:noFill/>
+          <a:ln>
+            <a:noFill/>
+          </a:ln>
+        </p:spPr>
+        <p:txBody>
+          <a:bodyPr wrap="square" lIns="0" tIns="0" rIns="0" bIns="0" rtlCol="0" anchor="t">
+            <a:noAutofit/>
+          </a:bodyPr>
+          <a:lstStyle/>
+          <a:p>
+            <a:pPr algn="l">
+              <a:lnSpc>
+                <a:spcPct val="110000"/>
+              </a:lnSpc>
+              <a:buNone/>
+            </a:pPr>
+            <a:r>
+              <a:rPr lang="es-ES" sz="950" b="1" i="0" dirty="0">
+                <a:solidFill>
+                  <a:srgbClr val="00263A"/>
+                </a:solidFill>
+                <a:latin typeface="Montserrat"/>
+                <a:cs typeface="Montserrat"/>
+              </a:rPr>
+              <a:t>Planificar también la mano de obra: quién está en cada turno y en cada máquina.</a:t>
+            </a:r>
+            <a:endParaRPr lang="es-ES" sz="950" dirty="0"/>
+          </a:p>
+        </p:txBody>
+      </p:sp>
+      <p:sp>
+        <p:nvSpPr>
+          <p:cNvPr id="32" name="Shape 32"/>
+          <p:cNvSpPr/>
+          <p:nvPr/>
+        </p:nvSpPr>
+        <p:spPr>
+          <a:xfrm>
+            <a:off x="548640" y="4279392"/>
+            <a:ext cx="11091672" cy="1389888"/>
+          </a:xfrm>
+          <a:prstGeom prst="roundRect">
+            <a:avLst>
+              <a:gd name="adj" fmla="val 5263"/>
+            </a:avLst>
+          </a:prstGeom>
+          <a:solidFill>
+            <a:srgbClr val="EAF3FA"/>
+          </a:solidFill>
+          <a:ln w="9525">
+            <a:solidFill>
+              <a:srgbClr val="98C9EB"/>
+            </a:solidFill>
+          </a:ln>
+        </p:spPr>
+        <p:txBody>
+          <a:bodyPr wrap="square" lIns="0" tIns="0" rIns="0" bIns="0" rtlCol="0" anchor="t">
+            <a:noAutofit/>
+          </a:bodyPr>
+          <a:lstStyle/>
+          <a:p>
+            <a:endParaRPr lang="es-ES" dirty="0"/>
+          </a:p>
+        </p:txBody>
+      </p:sp>
+      <p:sp>
+        <p:nvSpPr>
+          <p:cNvPr id="33" name="Shape 33"/>
+          <p:cNvSpPr txBox="1"/>
+          <p:nvPr/>
+        </p:nvSpPr>
+        <p:spPr>
+          <a:xfrm>
+            <a:off x="2926080" y="4389120"/>
+            <a:ext cx="2813304" cy="228600"/>
+          </a:xfrm>
+          <a:prstGeom prst="rect">
+            <a:avLst/>
+          </a:prstGeom>
+          <a:noFill/>
+          <a:ln>
+            <a:noFill/>
+          </a:ln>
+        </p:spPr>
+        <p:txBody>
+          <a:bodyPr wrap="square" lIns="0" tIns="0" rIns="0" bIns="0" rtlCol="0" anchor="t">
+            <a:noAutofit/>
+          </a:bodyPr>
+          <a:lstStyle/>
+          <a:p>
+            <a:pPr algn="ctr">
+              <a:lnSpc>
+                <a:spcPct val="105000"/>
+              </a:lnSpc>
+              <a:buNone/>
+            </a:pPr>
+            <a:r>
+              <a:rPr lang="es-ES" sz="900" b="1" i="0" dirty="0">
+                <a:solidFill>
+                  <a:srgbClr val="244C5A"/>
+                </a:solidFill>
+                <a:latin typeface="Montserrat"/>
+                <a:cs typeface="Montserrat"/>
+              </a:rPr>
+              <a:t>Migración a aplicación web</a:t>
+            </a:r>
+            <a:endParaRPr lang="es-ES" sz="900" dirty="0"/>
+          </a:p>
+        </p:txBody>
+      </p:sp>
+      <p:sp>
+        <p:nvSpPr>
+          <p:cNvPr id="34" name="Shape 34"/>
+          <p:cNvSpPr txBox="1"/>
+          <p:nvPr/>
+        </p:nvSpPr>
+        <p:spPr>
+          <a:xfrm>
+            <a:off x="5739384" y="4389120"/>
+            <a:ext cx="2813304" cy="228600"/>
+          </a:xfrm>
+          <a:prstGeom prst="rect">
+            <a:avLst/>
+          </a:prstGeom>
+          <a:noFill/>
+          <a:ln>
+            <a:noFill/>
+          </a:ln>
+        </p:spPr>
+        <p:txBody>
+          <a:bodyPr wrap="square" lIns="0" tIns="0" rIns="0" bIns="0" rtlCol="0" anchor="t">
+            <a:noAutofit/>
+          </a:bodyPr>
+          <a:lstStyle/>
+          <a:p>
+            <a:pPr algn="ctr">
+              <a:lnSpc>
+                <a:spcPct val="105000"/>
+              </a:lnSpc>
+              <a:buNone/>
+            </a:pPr>
+            <a:r>
+              <a:rPr lang="es-ES" sz="900" b="1" i="0" dirty="0">
+                <a:solidFill>
+                  <a:srgbClr val="244C5A"/>
+                </a:solidFill>
+                <a:latin typeface="Montserrat"/>
+                <a:cs typeface="Montserrat"/>
+              </a:rPr>
+              <a:t>Algoritmo de combinación</a:t>
+            </a:r>
+            <a:endParaRPr lang="es-ES" sz="900" dirty="0"/>
+          </a:p>
+        </p:txBody>
+      </p:sp>
+      <p:sp>
+        <p:nvSpPr>
+          <p:cNvPr id="35" name="Shape 35"/>
+          <p:cNvSpPr txBox="1"/>
+          <p:nvPr/>
+        </p:nvSpPr>
+        <p:spPr>
+          <a:xfrm>
+            <a:off x="8552688" y="4389120"/>
+            <a:ext cx="2813304" cy="228600"/>
+          </a:xfrm>
+          <a:prstGeom prst="rect">
+            <a:avLst/>
+          </a:prstGeom>
+          <a:noFill/>
+          <a:ln>
+            <a:noFill/>
+          </a:ln>
+        </p:spPr>
+        <p:txBody>
+          <a:bodyPr wrap="square" lIns="0" tIns="0" rIns="0" bIns="0" rtlCol="0" anchor="t">
+            <a:noAutofit/>
+          </a:bodyPr>
+          <a:lstStyle/>
+          <a:p>
+            <a:pPr algn="ctr">
+              <a:lnSpc>
+                <a:spcPct val="105000"/>
+              </a:lnSpc>
+              <a:buNone/>
+            </a:pPr>
+            <a:r>
+              <a:rPr lang="es-ES" sz="900" b="1" i="0" dirty="0">
+                <a:solidFill>
+                  <a:srgbClr val="244C5A"/>
+                </a:solidFill>
+                <a:latin typeface="Montserrat"/>
+                <a:cs typeface="Montserrat"/>
+              </a:rPr>
+              <a:t>PRAE</a:t>
+            </a:r>
+            <a:endParaRPr lang="es-ES" sz="900" dirty="0"/>
+          </a:p>
+        </p:txBody>
+      </p:sp>
+      <p:sp>
+        <p:nvSpPr>
+          <p:cNvPr id="36" name="Shape 36"/>
+          <p:cNvSpPr txBox="1"/>
+          <p:nvPr/>
+        </p:nvSpPr>
+        <p:spPr>
+          <a:xfrm>
+            <a:off x="822960" y="4663440"/>
+            <a:ext cx="2103120" cy="292608"/>
+          </a:xfrm>
+          <a:prstGeom prst="rect">
+            <a:avLst/>
+          </a:prstGeom>
+          <a:noFill/>
+          <a:ln>
+            <a:noFill/>
+          </a:ln>
+        </p:spPr>
+        <p:txBody>
+          <a:bodyPr wrap="square" lIns="0" tIns="0" rIns="0" bIns="0" rtlCol="0" anchor="ctr">
+            <a:noAutofit/>
+          </a:bodyPr>
+          <a:lstStyle/>
+          <a:p>
+            <a:pPr algn="l">
+              <a:lnSpc>
+                <a:spcPct val="105000"/>
+              </a:lnSpc>
+              <a:buNone/>
+            </a:pPr>
+            <a:r>
+              <a:rPr lang="es-ES" sz="1050" b="1" i="0" dirty="0">
+                <a:solidFill>
+                  <a:srgbClr val="00263A"/>
+                </a:solidFill>
+                <a:latin typeface="Montserrat"/>
+                <a:cs typeface="Montserrat"/>
+              </a:rPr>
+              <a:t>Ondupet</a:t>
+            </a:r>
+            <a:endParaRPr lang="es-ES" sz="1050" dirty="0"/>
+          </a:p>
+        </p:txBody>
+      </p:sp>
+      <p:sp>
+        <p:nvSpPr>
+          <p:cNvPr id="37" name="Shape 37"/>
+          <p:cNvSpPr/>
+          <p:nvPr/>
+        </p:nvSpPr>
+        <p:spPr>
+          <a:xfrm>
+            <a:off x="4195572" y="4672584"/>
+            <a:ext cx="274320" cy="274320"/>
+          </a:xfrm>
+          <a:prstGeom prst="ellipse">
+            <a:avLst/>
+          </a:prstGeom>
+          <a:solidFill>
+            <a:srgbClr val="00263A"/>
+          </a:solidFill>
+          <a:ln>
+            <a:noFill/>
+          </a:ln>
+        </p:spPr>
+        <p:txBody>
+          <a:bodyPr wrap="square" lIns="0" tIns="0" rIns="0" bIns="0" rtlCol="0" anchor="t">
+            <a:noAutofit/>
+          </a:bodyPr>
+          <a:lstStyle/>
+          <a:p>
+            <a:endParaRPr lang="es-ES" dirty="0"/>
+          </a:p>
+        </p:txBody>
+      </p:sp>
+      <p:pic>
+        <p:nvPicPr>
+          <p:cNvPr id="38" name="Icono 38" descr="Icono check"/>
+          <p:cNvPicPr>
+            <a:picLocks noChangeAspect="1"/>
+          </p:cNvPicPr>
+          <p:nvPr/>
+        </p:nvPicPr>
+        <p:blipFill>
+          <a:blip r:embed="rId5"/>
+          <a:stretch>
+            <a:fillRect/>
+          </a:stretch>
+        </p:blipFill>
+        <p:spPr>
+          <a:xfrm>
+            <a:off x="4257294" y="4734306"/>
+            <a:ext cx="150876" cy="150876"/>
+          </a:xfrm>
+          <a:prstGeom prst="rect">
+            <a:avLst/>
+          </a:prstGeom>
+        </p:spPr>
+      </p:pic>
+      <p:sp>
+        <p:nvSpPr>
+          <p:cNvPr id="39" name="Shape 39"/>
+          <p:cNvSpPr/>
+          <p:nvPr/>
+        </p:nvSpPr>
+        <p:spPr>
+          <a:xfrm>
+            <a:off x="7100316" y="4764024"/>
+            <a:ext cx="91440" cy="91440"/>
+          </a:xfrm>
+          <a:prstGeom prst="ellipse">
+            <a:avLst/>
+          </a:prstGeom>
+          <a:solidFill>
+            <a:srgbClr val="D7DFE5"/>
+          </a:solidFill>
+          <a:ln>
+            <a:noFill/>
+          </a:ln>
+        </p:spPr>
+        <p:txBody>
+          <a:bodyPr wrap="square" lIns="0" tIns="0" rIns="0" bIns="0" rtlCol="0" anchor="t">
+            <a:noAutofit/>
+          </a:bodyPr>
+          <a:lstStyle/>
+          <a:p>
+            <a:endParaRPr lang="es-ES" dirty="0"/>
+          </a:p>
+        </p:txBody>
+      </p:sp>
+      <p:sp>
+        <p:nvSpPr>
+          <p:cNvPr id="40" name="Shape 40"/>
+          <p:cNvSpPr/>
+          <p:nvPr/>
+        </p:nvSpPr>
+        <p:spPr>
+          <a:xfrm>
+            <a:off x="9822180" y="4672584"/>
+            <a:ext cx="274320" cy="274320"/>
+          </a:xfrm>
+          <a:prstGeom prst="ellipse">
+            <a:avLst/>
+          </a:prstGeom>
+          <a:solidFill>
+            <a:srgbClr val="00263A"/>
+          </a:solidFill>
+          <a:ln>
+            <a:noFill/>
+          </a:ln>
+        </p:spPr>
+        <p:txBody>
+          <a:bodyPr wrap="square" lIns="0" tIns="0" rIns="0" bIns="0" rtlCol="0" anchor="t">
+            <a:noAutofit/>
+          </a:bodyPr>
+          <a:lstStyle/>
+          <a:p>
+            <a:endParaRPr lang="es-ES" dirty="0"/>
+          </a:p>
+        </p:txBody>
+      </p:sp>
+      <p:pic>
+        <p:nvPicPr>
+          <p:cNvPr id="41" name="Icono 41" descr="Icono check"/>
+          <p:cNvPicPr>
+            <a:picLocks noChangeAspect="1"/>
+          </p:cNvPicPr>
+          <p:nvPr/>
+        </p:nvPicPr>
+        <p:blipFill>
+          <a:blip r:embed="rId6"/>
+          <a:stretch>
+            <a:fillRect/>
+          </a:stretch>
+        </p:blipFill>
+        <p:spPr>
+          <a:xfrm>
+            <a:off x="9883902" y="4734306"/>
+            <a:ext cx="150876" cy="150876"/>
+          </a:xfrm>
+          <a:prstGeom prst="rect">
+            <a:avLst/>
+          </a:prstGeom>
+        </p:spPr>
+      </p:pic>
+      <p:sp>
+        <p:nvSpPr>
+          <p:cNvPr id="42" name="Shape 42"/>
+          <p:cNvSpPr txBox="1"/>
+          <p:nvPr/>
+        </p:nvSpPr>
+        <p:spPr>
+          <a:xfrm>
+            <a:off x="822960" y="4983480"/>
+            <a:ext cx="2103120" cy="292608"/>
+          </a:xfrm>
+          <a:prstGeom prst="rect">
+            <a:avLst/>
+          </a:prstGeom>
+          <a:noFill/>
+          <a:ln>
+            <a:noFill/>
+          </a:ln>
+        </p:spPr>
+        <p:txBody>
+          <a:bodyPr wrap="square" lIns="0" tIns="0" rIns="0" bIns="0" rtlCol="0" anchor="ctr">
+            <a:noAutofit/>
+          </a:bodyPr>
+          <a:lstStyle/>
+          <a:p>
+            <a:pPr algn="l">
+              <a:lnSpc>
+                <a:spcPct val="105000"/>
+              </a:lnSpc>
+              <a:buNone/>
+            </a:pPr>
+            <a:r>
+              <a:rPr lang="es-ES" sz="1050" b="1" i="0" dirty="0">
+                <a:solidFill>
+                  <a:srgbClr val="00263A"/>
+                </a:solidFill>
+                <a:latin typeface="Montserrat"/>
+                <a:cs typeface="Montserrat"/>
+              </a:rPr>
+              <a:t>Ondupack</a:t>
+            </a:r>
+            <a:endParaRPr lang="es-ES" sz="1050" dirty="0"/>
+          </a:p>
+        </p:txBody>
+      </p:sp>
+      <p:sp>
+        <p:nvSpPr>
+          <p:cNvPr id="43" name="Shape 43"/>
+          <p:cNvSpPr/>
+          <p:nvPr/>
+        </p:nvSpPr>
+        <p:spPr>
+          <a:xfrm>
+            <a:off x="4195572" y="4992624"/>
+            <a:ext cx="274320" cy="274320"/>
+          </a:xfrm>
+          <a:prstGeom prst="ellipse">
+            <a:avLst/>
+          </a:prstGeom>
+          <a:solidFill>
+            <a:srgbClr val="00263A"/>
+          </a:solidFill>
+          <a:ln>
+            <a:noFill/>
+          </a:ln>
+        </p:spPr>
+        <p:txBody>
+          <a:bodyPr wrap="square" lIns="0" tIns="0" rIns="0" bIns="0" rtlCol="0" anchor="t">
+            <a:noAutofit/>
+          </a:bodyPr>
+          <a:lstStyle/>
+          <a:p>
+            <a:endParaRPr lang="es-ES" dirty="0"/>
+          </a:p>
+        </p:txBody>
+      </p:sp>
+      <p:pic>
+        <p:nvPicPr>
+          <p:cNvPr id="44" name="Icono 44" descr="Icono check"/>
+          <p:cNvPicPr>
+            <a:picLocks noChangeAspect="1"/>
+          </p:cNvPicPr>
+          <p:nvPr/>
+        </p:nvPicPr>
+        <p:blipFill>
+          <a:blip r:embed="rId7"/>
+          <a:stretch>
+            <a:fillRect/>
+          </a:stretch>
+        </p:blipFill>
+        <p:spPr>
+          <a:xfrm>
+            <a:off x="4257294" y="5054346"/>
+            <a:ext cx="150876" cy="150876"/>
+          </a:xfrm>
+          <a:prstGeom prst="rect">
+            <a:avLst/>
+          </a:prstGeom>
+        </p:spPr>
+      </p:pic>
+      <p:sp>
+        <p:nvSpPr>
+          <p:cNvPr id="45" name="Shape 45"/>
+          <p:cNvSpPr/>
+          <p:nvPr/>
+        </p:nvSpPr>
+        <p:spPr>
+          <a:xfrm>
+            <a:off x="7008876" y="4992624"/>
+            <a:ext cx="274320" cy="274320"/>
+          </a:xfrm>
+          <a:prstGeom prst="ellipse">
+            <a:avLst/>
+          </a:prstGeom>
+          <a:solidFill>
+            <a:srgbClr val="00263A"/>
+          </a:solidFill>
+          <a:ln>
+            <a:noFill/>
+          </a:ln>
+        </p:spPr>
+        <p:txBody>
+          <a:bodyPr wrap="square" lIns="0" tIns="0" rIns="0" bIns="0" rtlCol="0" anchor="t">
+            <a:noAutofit/>
+          </a:bodyPr>
+          <a:lstStyle/>
+          <a:p>
+            <a:endParaRPr lang="es-ES" dirty="0"/>
+          </a:p>
+        </p:txBody>
+      </p:sp>
+      <p:pic>
+        <p:nvPicPr>
+          <p:cNvPr id="46" name="Icono 46" descr="Icono check"/>
+          <p:cNvPicPr>
+            <a:picLocks noChangeAspect="1"/>
+          </p:cNvPicPr>
+          <p:nvPr/>
+        </p:nvPicPr>
+        <p:blipFill>
+          <a:blip r:embed="rId8"/>
+          <a:stretch>
+            <a:fillRect/>
+          </a:stretch>
+        </p:blipFill>
+        <p:spPr>
+          <a:xfrm>
+            <a:off x="7070598" y="5054346"/>
+            <a:ext cx="150876" cy="150876"/>
+          </a:xfrm>
+          <a:prstGeom prst="rect">
+            <a:avLst/>
+          </a:prstGeom>
+        </p:spPr>
+      </p:pic>
+      <p:sp>
+        <p:nvSpPr>
+          <p:cNvPr id="47" name="Shape 47"/>
+          <p:cNvSpPr/>
+          <p:nvPr/>
+        </p:nvSpPr>
+        <p:spPr>
+          <a:xfrm>
+            <a:off x="9913620" y="5084064"/>
+            <a:ext cx="91440" cy="91440"/>
+          </a:xfrm>
+          <a:prstGeom prst="ellipse">
+            <a:avLst/>
+          </a:prstGeom>
+          <a:solidFill>
+            <a:srgbClr val="D7DFE5"/>
+          </a:solidFill>
+          <a:ln>
+            <a:noFill/>
+          </a:ln>
+        </p:spPr>
+        <p:txBody>
+          <a:bodyPr wrap="square" lIns="0" tIns="0" rIns="0" bIns="0" rtlCol="0" anchor="t">
+            <a:noAutofit/>
+          </a:bodyPr>
+          <a:lstStyle/>
+          <a:p>
+            <a:endParaRPr lang="es-ES" dirty="0"/>
+          </a:p>
+        </p:txBody>
+      </p:sp>
+      <p:sp>
+        <p:nvSpPr>
+          <p:cNvPr id="48" name="Shape 48"/>
+          <p:cNvSpPr txBox="1"/>
+          <p:nvPr/>
+        </p:nvSpPr>
+        <p:spPr>
+          <a:xfrm>
+            <a:off x="822960" y="5303520"/>
+            <a:ext cx="2103120" cy="292608"/>
+          </a:xfrm>
+          <a:prstGeom prst="rect">
+            <a:avLst/>
+          </a:prstGeom>
+          <a:noFill/>
+          <a:ln>
+            <a:noFill/>
+          </a:ln>
+        </p:spPr>
+        <p:txBody>
+          <a:bodyPr wrap="square" lIns="0" tIns="0" rIns="0" bIns="0" rtlCol="0" anchor="ctr">
+            <a:noAutofit/>
+          </a:bodyPr>
+          <a:lstStyle/>
+          <a:p>
+            <a:pPr algn="l">
+              <a:lnSpc>
+                <a:spcPct val="105000"/>
+              </a:lnSpc>
+              <a:buNone/>
+            </a:pPr>
+            <a:r>
+              <a:rPr lang="es-ES" sz="1050" b="1" i="0" dirty="0">
+                <a:solidFill>
+                  <a:srgbClr val="00263A"/>
+                </a:solidFill>
+                <a:latin typeface="Montserrat"/>
+                <a:cs typeface="Montserrat"/>
+              </a:rPr>
+              <a:t>MGT + PDA</a:t>
+            </a:r>
+            <a:endParaRPr lang="es-ES" sz="1050" dirty="0"/>
+          </a:p>
+        </p:txBody>
+      </p:sp>
+      <p:sp>
+        <p:nvSpPr>
+          <p:cNvPr id="49" name="Shape 49"/>
+          <p:cNvSpPr txBox="1"/>
+          <p:nvPr/>
+        </p:nvSpPr>
+        <p:spPr>
+          <a:xfrm>
+            <a:off x="2926080" y="5303520"/>
+            <a:ext cx="8439912" cy="292608"/>
+          </a:xfrm>
+          <a:prstGeom prst="rect">
+            <a:avLst/>
+          </a:prstGeom>
+          <a:noFill/>
+          <a:ln>
+            <a:noFill/>
+          </a:ln>
+        </p:spPr>
+        <p:txBody>
+          <a:bodyPr wrap="square" lIns="0" tIns="0" rIns="0" bIns="0" rtlCol="0" anchor="ctr">
+            <a:noAutofit/>
+          </a:bodyPr>
+          <a:lstStyle/>
+          <a:p>
+            <a:pPr algn="ctr">
+              <a:lnSpc>
+                <a:spcPct val="105000"/>
+              </a:lnSpc>
+              <a:buNone/>
+            </a:pPr>
+            <a:r>
+              <a:rPr lang="es-ES" sz="950" b="0" i="1" dirty="0">
+                <a:solidFill>
+                  <a:srgbClr val="9AA9B4"/>
+                </a:solidFill>
+                <a:latin typeface="Montserrat"/>
+                <a:cs typeface="Montserrat"/>
+              </a:rPr>
+              <a:t>Por definir tras su matriz de procesos</a:t>
+            </a:r>
+            <a:endParaRPr lang="es-ES" sz="950" dirty="0"/>
+          </a:p>
+        </p:txBody>
+      </p:sp>
+      <p:sp>
+        <p:nvSpPr>
+          <p:cNvPr id="50" name="Shape 50"/>
+          <p:cNvSpPr txBox="1"/>
+          <p:nvPr/>
+        </p:nvSpPr>
+        <p:spPr>
+          <a:xfrm>
+            <a:off x="10424160" y="6053328"/>
+            <a:ext cx="1216152" cy="256032"/>
+          </a:xfrm>
+          <a:prstGeom prst="rect">
+            <a:avLst/>
+          </a:prstGeom>
+          <a:noFill/>
+          <a:ln>
+            <a:noFill/>
+          </a:ln>
+        </p:spPr>
+        <p:txBody>
+          <a:bodyPr wrap="square" lIns="0" tIns="0" rIns="0" bIns="0" rtlCol="0" anchor="t">
+            <a:noAutofit/>
+          </a:bodyPr>
+          <a:lstStyle/>
+          <a:p>
+            <a:pPr algn="r">
+              <a:lnSpc>
+                <a:spcPct val="105000"/>
+              </a:lnSpc>
+              <a:buNone/>
+            </a:pPr>
+            <a:r>
+              <a:rPr lang="es-ES" sz="900" b="0" i="0" dirty="0">
+                <a:solidFill>
+                  <a:srgbClr val="9AA9B4"/>
+                </a:solidFill>
+                <a:latin typeface="Montserrat"/>
+                <a:cs typeface="Montserrat"/>
+              </a:rPr>
+              <a:t>10</a:t>
+            </a:r>
+            <a:endParaRPr lang="es-ES" sz="900" dirty="0"/>
+          </a:p>
+        </p:txBody>
+      </p:sp>
+    </p:spTree>
+  </p:cSld>
+  <p:clrMapOvr>
+    <a:masterClrMapping/>
+  </p:clrMapOvr>
+</p:sld>
+</file>
+
 <file path=ppt/slides/slide2.xml><?xml version="1.0" encoding="utf-8"?>
 <p:sld xmlns:a="http://schemas.openxmlformats.org/drawingml/2006/main" xmlns:r="http://schemas.openxmlformats.org/officeDocument/2006/relationships" xmlns:p="http://schemas.openxmlformats.org/presentationml/2006/main">
   <p:cSld>
@@ -8548,6 +13037,227 @@
             </a:avLst>
           </a:prstGeom>
           <a:solidFill>
+            <a:srgbClr val="00263A"/>
+          </a:solidFill>
+          <a:ln w="9525">
+            <a:solidFill>
+              <a:srgbClr val="00263A"/>
+            </a:solidFill>
+          </a:ln>
+        </p:spPr>
+        <p:txBody>
+          <a:bodyPr wrap="square" lIns="0" tIns="0" rIns="0" bIns="0" rtlCol="0" anchor="t">
+            <a:noAutofit/>
+          </a:bodyPr>
+          <a:lstStyle/>
+          <a:p>
+            <a:endParaRPr lang="es-ES" dirty="0"/>
+          </a:p>
+        </p:txBody>
+      </p:sp>
+      <p:sp>
+        <p:nvSpPr>
+          <p:cNvPr id="9" name="Shape 9"/>
+          <p:cNvSpPr/>
+          <p:nvPr/>
+        </p:nvSpPr>
+        <p:spPr>
+          <a:xfrm>
+            <a:off x="777240" y="2578608"/>
+            <a:ext cx="457200" cy="457200"/>
+          </a:xfrm>
+          <a:prstGeom prst="ellipse">
+            <a:avLst/>
+          </a:prstGeom>
+          <a:solidFill>
+            <a:srgbClr val="98C9EB"/>
+          </a:solidFill>
+          <a:ln>
+            <a:noFill/>
+          </a:ln>
+        </p:spPr>
+        <p:txBody>
+          <a:bodyPr wrap="square" lIns="0" tIns="0" rIns="0" bIns="0" rtlCol="0" anchor="ctr">
+            <a:noAutofit/>
+          </a:bodyPr>
+          <a:lstStyle/>
+          <a:p>
+            <a:pPr algn="ctr">
+              <a:lnSpc>
+                <a:spcPct val="105000"/>
+              </a:lnSpc>
+              <a:buNone/>
+            </a:pPr>
+            <a:r>
+              <a:rPr lang="es-ES" sz="1200" b="1" i="0" dirty="0">
+                <a:solidFill>
+                  <a:srgbClr val="00263A"/>
+                </a:solidFill>
+                <a:latin typeface="Montserrat"/>
+                <a:cs typeface="Montserrat"/>
+              </a:rPr>
+              <a:t>02</a:t>
+            </a:r>
+            <a:endParaRPr lang="es-ES" sz="1200" dirty="0"/>
+          </a:p>
+        </p:txBody>
+      </p:sp>
+      <p:sp>
+        <p:nvSpPr>
+          <p:cNvPr id="10" name="Shape 10"/>
+          <p:cNvSpPr txBox="1"/>
+          <p:nvPr/>
+        </p:nvSpPr>
+        <p:spPr>
+          <a:xfrm>
+            <a:off x="1463040" y="2395728"/>
+            <a:ext cx="2651760" cy="822960"/>
+          </a:xfrm>
+          <a:prstGeom prst="rect">
+            <a:avLst/>
+          </a:prstGeom>
+          <a:noFill/>
+          <a:ln>
+            <a:noFill/>
+          </a:ln>
+        </p:spPr>
+        <p:txBody>
+          <a:bodyPr wrap="square" lIns="0" tIns="0" rIns="0" bIns="0" rtlCol="0" anchor="ctr">
+            <a:noAutofit/>
+          </a:bodyPr>
+          <a:lstStyle/>
+          <a:p>
+            <a:pPr algn="l">
+              <a:lnSpc>
+                <a:spcPct val="105000"/>
+              </a:lnSpc>
+              <a:buNone/>
+            </a:pPr>
+            <a:r>
+              <a:rPr lang="es-ES" sz="1600" b="1" i="0" dirty="0">
+                <a:solidFill>
+                  <a:srgbClr val="FFFFFF"/>
+                </a:solidFill>
+                <a:latin typeface="Montserrat"/>
+                <a:cs typeface="Montserrat"/>
+              </a:rPr>
+              <a:t>Ondupack</a:t>
+            </a:r>
+            <a:endParaRPr lang="es-ES" sz="1600" dirty="0"/>
+          </a:p>
+        </p:txBody>
+      </p:sp>
+      <p:sp>
+        <p:nvSpPr>
+          <p:cNvPr id="11" name="Shape 11"/>
+          <p:cNvSpPr txBox="1"/>
+          <p:nvPr/>
+        </p:nvSpPr>
+        <p:spPr>
+          <a:xfrm>
+            <a:off x="4206240" y="2395728"/>
+            <a:ext cx="5212080" cy="822960"/>
+          </a:xfrm>
+          <a:prstGeom prst="rect">
+            <a:avLst/>
+          </a:prstGeom>
+          <a:noFill/>
+          <a:ln>
+            <a:noFill/>
+          </a:ln>
+        </p:spPr>
+        <p:txBody>
+          <a:bodyPr wrap="square" lIns="0" tIns="0" rIns="0" bIns="0" rtlCol="0" anchor="ctr">
+            <a:noAutofit/>
+          </a:bodyPr>
+          <a:lstStyle/>
+          <a:p>
+            <a:pPr algn="l">
+              <a:lnSpc>
+                <a:spcPct val="105000"/>
+              </a:lnSpc>
+              <a:buNone/>
+            </a:pPr>
+            <a:r>
+              <a:rPr lang="es-ES" sz="1100" b="0" i="0" dirty="0">
+                <a:solidFill>
+                  <a:srgbClr val="DCE7EF"/>
+                </a:solidFill>
+                <a:latin typeface="Montserrat"/>
+                <a:cs typeface="Montserrat"/>
+              </a:rPr>
+              <a:t>Matriz de procesos de planificación</a:t>
+            </a:r>
+            <a:endParaRPr lang="es-ES" sz="1100" dirty="0"/>
+          </a:p>
+        </p:txBody>
+      </p:sp>
+      <p:sp>
+        <p:nvSpPr>
+          <p:cNvPr id="12" name="Shape 12"/>
+          <p:cNvSpPr/>
+          <p:nvPr/>
+        </p:nvSpPr>
+        <p:spPr>
+          <a:xfrm>
+            <a:off x="9628632" y="2651760"/>
+            <a:ext cx="1783080" cy="310896"/>
+          </a:xfrm>
+          <a:prstGeom prst="roundRect">
+            <a:avLst>
+              <a:gd name="adj" fmla="val 50000"/>
+            </a:avLst>
+          </a:prstGeom>
+          <a:solidFill>
+            <a:srgbClr val="98C9EB"/>
+          </a:solidFill>
+          <a:ln>
+            <a:noFill/>
+          </a:ln>
+        </p:spPr>
+        <p:txBody>
+          <a:bodyPr wrap="square" lIns="0" tIns="0" rIns="0" bIns="0" rtlCol="0" anchor="ctr">
+            <a:noAutofit/>
+          </a:bodyPr>
+          <a:lstStyle/>
+          <a:p>
+            <a:pPr algn="ctr">
+              <a:lnSpc>
+                <a:spcPct val="105000"/>
+              </a:lnSpc>
+              <a:buNone/>
+            </a:pPr>
+            <a:r>
+              <a:rPr lang="es-ES" sz="850" b="1" i="0" spc="40" dirty="0">
+                <a:solidFill>
+                  <a:srgbClr val="00263A"/>
+                </a:solidFill>
+                <a:latin typeface="Montserrat"/>
+                <a:cs typeface="Montserrat"/>
+              </a:rPr>
+              <a:t>AVANZADO</a:t>
+            </a:r>
+            <a:endParaRPr lang="es-ES" sz="850" dirty="0"/>
+          </a:p>
+        </p:txBody>
+      </p:sp>
+      <p:sp>
+        <p:nvSpPr>
+          <p:cNvPr id="13" name="Shape 13"/>
+          <p:cNvSpPr/>
+          <p:nvPr/>
+        </p:nvSpPr>
+        <p:spPr>
+          <a:xfrm>
+            <a:off x="548640" y="3419856"/>
+            <a:ext cx="11091672" cy="822960"/>
+          </a:xfrm>
+          <a:prstGeom prst="roundRect">
+            <a:avLst>
+              <a:gd name="adj" fmla="val 8888"/>
+            </a:avLst>
+          </a:prstGeom>
+          <a:solidFill>
             <a:srgbClr val="F5F7F8"/>
           </a:solidFill>
           <a:ln w="9525">
@@ -8568,13 +13278,13 @@
       </p:sp>
       <p:sp>
         <p:nvSpPr>
-          <p:cNvPr id="9" name="Shape 9"/>
+          <p:cNvPr id="14" name="Shape 14"/>
           <p:cNvSpPr/>
           <p:nvPr/>
         </p:nvSpPr>
         <p:spPr>
           <a:xfrm>
-            <a:off x="777240" y="2578608"/>
+            <a:off x="777240" y="3602736"/>
             <a:ext cx="457200" cy="457200"/>
           </a:xfrm>
           <a:prstGeom prst="ellipse">
@@ -8607,7 +13317,7 @@
                 <a:latin typeface="Montserrat"/>
                 <a:cs typeface="Montserrat"/>
               </a:rPr>
-              <a:t>02</a:t>
+              <a:t>03</a:t>
             </a:r>
             <a:endParaRPr lang="es-ES" sz="1200" dirty="0"/>
           </a:p>
@@ -8615,13 +13325,13 @@
       </p:sp>
       <p:sp>
         <p:nvSpPr>
-          <p:cNvPr id="10" name="Shape 10"/>
+          <p:cNvPr id="15" name="Shape 15"/>
           <p:cNvSpPr txBox="1"/>
           <p:nvPr/>
         </p:nvSpPr>
         <p:spPr>
           <a:xfrm>
-            <a:off x="1463040" y="2395728"/>
+            <a:off x="1463040" y="3419856"/>
             <a:ext cx="2651760" cy="822960"/>
           </a:xfrm>
           <a:prstGeom prst="rect">
@@ -8652,7 +13362,7 @@
                 <a:latin typeface="Montserrat"/>
                 <a:cs typeface="Montserrat"/>
               </a:rPr>
-              <a:t>Ondupack</a:t>
+              <a:t>MGT + PDA</a:t>
             </a:r>
             <a:endParaRPr lang="es-ES" sz="1600" dirty="0"/>
           </a:p>
@@ -8660,13 +13370,13 @@
       </p:sp>
       <p:sp>
         <p:nvSpPr>
-          <p:cNvPr id="11" name="Shape 11"/>
+          <p:cNvPr id="16" name="Shape 16"/>
           <p:cNvSpPr txBox="1"/>
           <p:nvPr/>
         </p:nvSpPr>
         <p:spPr>
           <a:xfrm>
-            <a:off x="4206240" y="2395728"/>
+            <a:off x="4206240" y="3419856"/>
             <a:ext cx="5212080" cy="822960"/>
           </a:xfrm>
           <a:prstGeom prst="rect">
@@ -8697,7 +13407,7 @@
                 <a:latin typeface="Montserrat"/>
                 <a:cs typeface="Montserrat"/>
               </a:rPr>
-              <a:t>Matriz de procesos de planificación</a:t>
+              <a:t>Papeleras: matriz de procesos de planificación, en conjunto</a:t>
             </a:r>
             <a:endParaRPr lang="es-ES" sz="1100" dirty="0"/>
           </a:p>
@@ -8705,13 +13415,13 @@
       </p:sp>
       <p:sp>
         <p:nvSpPr>
-          <p:cNvPr id="12" name="Shape 12"/>
+          <p:cNvPr id="17" name="Shape 17"/>
           <p:cNvSpPr/>
           <p:nvPr/>
         </p:nvSpPr>
         <p:spPr>
           <a:xfrm>
-            <a:off x="9628632" y="2651760"/>
+            <a:off x="9628632" y="3675888"/>
             <a:ext cx="1783080" cy="310896"/>
           </a:xfrm>
           <a:prstGeom prst="roundRect">
@@ -8757,13 +13467,13 @@
       </p:sp>
       <p:sp>
         <p:nvSpPr>
-          <p:cNvPr id="13" name="Shape 13"/>
+          <p:cNvPr id="18" name="Shape 18"/>
           <p:cNvSpPr/>
           <p:nvPr/>
         </p:nvSpPr>
         <p:spPr>
           <a:xfrm>
-            <a:off x="548640" y="3419856"/>
+            <a:off x="548640" y="4443984"/>
             <a:ext cx="11091672" cy="822960"/>
           </a:xfrm>
           <a:prstGeom prst="roundRect">
@@ -8792,230 +13502,6 @@
       </p:sp>
       <p:sp>
         <p:nvSpPr>
-          <p:cNvPr id="14" name="Shape 14"/>
-          <p:cNvSpPr/>
-          <p:nvPr/>
-        </p:nvSpPr>
-        <p:spPr>
-          <a:xfrm>
-            <a:off x="777240" y="3602736"/>
-            <a:ext cx="457200" cy="457200"/>
-          </a:xfrm>
-          <a:prstGeom prst="ellipse">
-            <a:avLst/>
-          </a:prstGeom>
-          <a:solidFill>
-            <a:srgbClr val="00263A"/>
-          </a:solidFill>
-          <a:ln>
-            <a:noFill/>
-          </a:ln>
-        </p:spPr>
-        <p:txBody>
-          <a:bodyPr wrap="square" lIns="0" tIns="0" rIns="0" bIns="0" rtlCol="0" anchor="ctr">
-            <a:noAutofit/>
-          </a:bodyPr>
-          <a:lstStyle/>
-          <a:p>
-            <a:pPr algn="ctr">
-              <a:lnSpc>
-                <a:spcPct val="105000"/>
-              </a:lnSpc>
-              <a:buNone/>
-            </a:pPr>
-            <a:r>
-              <a:rPr lang="es-ES" sz="1200" b="1" i="0" dirty="0">
-                <a:solidFill>
-                  <a:srgbClr val="98C9EB"/>
-                </a:solidFill>
-                <a:latin typeface="Montserrat"/>
-                <a:cs typeface="Montserrat"/>
-              </a:rPr>
-              <a:t>03</a:t>
-            </a:r>
-            <a:endParaRPr lang="es-ES" sz="1200" dirty="0"/>
-          </a:p>
-        </p:txBody>
-      </p:sp>
-      <p:sp>
-        <p:nvSpPr>
-          <p:cNvPr id="15" name="Shape 15"/>
-          <p:cNvSpPr txBox="1"/>
-          <p:nvPr/>
-        </p:nvSpPr>
-        <p:spPr>
-          <a:xfrm>
-            <a:off x="1463040" y="3419856"/>
-            <a:ext cx="2651760" cy="822960"/>
-          </a:xfrm>
-          <a:prstGeom prst="rect">
-            <a:avLst/>
-          </a:prstGeom>
-          <a:noFill/>
-          <a:ln>
-            <a:noFill/>
-          </a:ln>
-        </p:spPr>
-        <p:txBody>
-          <a:bodyPr wrap="square" lIns="0" tIns="0" rIns="0" bIns="0" rtlCol="0" anchor="ctr">
-            <a:noAutofit/>
-          </a:bodyPr>
-          <a:lstStyle/>
-          <a:p>
-            <a:pPr algn="l">
-              <a:lnSpc>
-                <a:spcPct val="105000"/>
-              </a:lnSpc>
-              <a:buNone/>
-            </a:pPr>
-            <a:r>
-              <a:rPr lang="es-ES" sz="1600" b="1" i="0" dirty="0">
-                <a:solidFill>
-                  <a:srgbClr val="00263A"/>
-                </a:solidFill>
-                <a:latin typeface="Montserrat"/>
-                <a:cs typeface="Montserrat"/>
-              </a:rPr>
-              <a:t>MGT + PDA</a:t>
-            </a:r>
-            <a:endParaRPr lang="es-ES" sz="1600" dirty="0"/>
-          </a:p>
-        </p:txBody>
-      </p:sp>
-      <p:sp>
-        <p:nvSpPr>
-          <p:cNvPr id="16" name="Shape 16"/>
-          <p:cNvSpPr txBox="1"/>
-          <p:nvPr/>
-        </p:nvSpPr>
-        <p:spPr>
-          <a:xfrm>
-            <a:off x="4206240" y="3419856"/>
-            <a:ext cx="5212080" cy="822960"/>
-          </a:xfrm>
-          <a:prstGeom prst="rect">
-            <a:avLst/>
-          </a:prstGeom>
-          <a:noFill/>
-          <a:ln>
-            <a:noFill/>
-          </a:ln>
-        </p:spPr>
-        <p:txBody>
-          <a:bodyPr wrap="square" lIns="0" tIns="0" rIns="0" bIns="0" rtlCol="0" anchor="ctr">
-            <a:noAutofit/>
-          </a:bodyPr>
-          <a:lstStyle/>
-          <a:p>
-            <a:pPr algn="l">
-              <a:lnSpc>
-                <a:spcPct val="105000"/>
-              </a:lnSpc>
-              <a:buNone/>
-            </a:pPr>
-            <a:r>
-              <a:rPr lang="es-ES" sz="1100" b="0" i="0" dirty="0">
-                <a:solidFill>
-                  <a:srgbClr val="5B6B78"/>
-                </a:solidFill>
-                <a:latin typeface="Montserrat"/>
-                <a:cs typeface="Montserrat"/>
-              </a:rPr>
-              <a:t>Papeleras: matriz de procesos de planificación, en conjunto</a:t>
-            </a:r>
-            <a:endParaRPr lang="es-ES" sz="1100" dirty="0"/>
-          </a:p>
-        </p:txBody>
-      </p:sp>
-      <p:sp>
-        <p:nvSpPr>
-          <p:cNvPr id="17" name="Shape 17"/>
-          <p:cNvSpPr/>
-          <p:nvPr/>
-        </p:nvSpPr>
-        <p:spPr>
-          <a:xfrm>
-            <a:off x="9628632" y="3675888"/>
-            <a:ext cx="1783080" cy="310896"/>
-          </a:xfrm>
-          <a:prstGeom prst="roundRect">
-            <a:avLst>
-              <a:gd name="adj" fmla="val 50000"/>
-            </a:avLst>
-          </a:prstGeom>
-          <a:solidFill>
-            <a:srgbClr val="FFFFFF"/>
-          </a:solidFill>
-          <a:ln w="12700">
-            <a:solidFill>
-              <a:srgbClr val="98C9EB"/>
-            </a:solidFill>
-            <a:prstDash val="dash"/>
-          </a:ln>
-        </p:spPr>
-        <p:txBody>
-          <a:bodyPr wrap="square" lIns="0" tIns="0" rIns="0" bIns="0" rtlCol="0" anchor="ctr">
-            <a:noAutofit/>
-          </a:bodyPr>
-          <a:lstStyle/>
-          <a:p>
-            <a:pPr algn="ctr">
-              <a:lnSpc>
-                <a:spcPct val="105000"/>
-              </a:lnSpc>
-              <a:buNone/>
-            </a:pPr>
-            <a:r>
-              <a:rPr lang="es-ES" sz="850" b="1" i="0" spc="40" dirty="0">
-                <a:solidFill>
-                  <a:srgbClr val="244C5A"/>
-                </a:solidFill>
-                <a:latin typeface="Montserrat"/>
-                <a:cs typeface="Montserrat"/>
-              </a:rPr>
-              <a:t>EN PREPARACIÓN</a:t>
-            </a:r>
-            <a:endParaRPr lang="es-ES" sz="850" dirty="0"/>
-          </a:p>
-        </p:txBody>
-      </p:sp>
-      <p:sp>
-        <p:nvSpPr>
-          <p:cNvPr id="18" name="Shape 18"/>
-          <p:cNvSpPr/>
-          <p:nvPr/>
-        </p:nvSpPr>
-        <p:spPr>
-          <a:xfrm>
-            <a:off x="548640" y="4443984"/>
-            <a:ext cx="11091672" cy="822960"/>
-          </a:xfrm>
-          <a:prstGeom prst="roundRect">
-            <a:avLst>
-              <a:gd name="adj" fmla="val 8888"/>
-            </a:avLst>
-          </a:prstGeom>
-          <a:solidFill>
-            <a:srgbClr val="F5F7F8"/>
-          </a:solidFill>
-          <a:ln w="9525">
-            <a:solidFill>
-              <a:srgbClr val="D7DFE5"/>
-            </a:solidFill>
-          </a:ln>
-        </p:spPr>
-        <p:txBody>
-          <a:bodyPr wrap="square" lIns="0" tIns="0" rIns="0" bIns="0" rtlCol="0" anchor="t">
-            <a:noAutofit/>
-          </a:bodyPr>
-          <a:lstStyle/>
-          <a:p>
-            <a:endParaRPr lang="es-ES" dirty="0"/>
-          </a:p>
-        </p:txBody>
-      </p:sp>
-      <p:sp>
-        <p:nvSpPr>
           <p:cNvPr id="19" name="Shape 19"/>
           <p:cNvSpPr/>
           <p:nvPr/>
@@ -9145,7 +13631,7 @@
                 <a:latin typeface="Montserrat"/>
                 <a:cs typeface="Montserrat"/>
               </a:rPr>
-              <a:t>Próximos pasos detallados por planta</a:t>
+              <a:t>Próximos pasos detallados y proyectos 2027</a:t>
             </a:r>
             <a:endParaRPr lang="es-ES" sz="1100" dirty="0"/>
           </a:p>
@@ -12456,57 +16942,8 @@
                 </a:solidFill>
                 <a:latin typeface="Montserrat"/>
               </a:rPr>
-              <a:t>Matriz de procesos de planificación</a:t>
-            </a:r>
-          </a:p>
-        </p:txBody>
-      </p:sp>
-      <p:sp>
-        <p:nvSpPr>
-          <p:cNvPr id="51" name="Shape 51"/>
-          <p:cNvSpPr/>
-          <p:nvPr/>
-        </p:nvSpPr>
-        <p:spPr>
-          <a:xfrm>
-            <a:off x="868680" y="5074920"/>
-            <a:ext cx="1920240" cy="347472"/>
-          </a:xfrm>
-          <a:prstGeom prst="roundRect">
-            <a:avLst>
-              <a:gd name="adj" fmla="val 50000"/>
-            </a:avLst>
-          </a:prstGeom>
-          <a:solidFill>
-            <a:srgbClr val="00263A"/>
-          </a:solidFill>
-          <a:ln>
-            <a:noFill/>
-          </a:ln>
-        </p:spPr>
-        <p:txBody>
-          <a:bodyPr wrap="square" lIns="0" tIns="0" rIns="0" bIns="0" rtlCol="0" anchor="ctr">
-            <a:noAutofit/>
-          </a:bodyPr>
-          <a:lstStyle/>
-          <a:p>
-            <a:pPr algn="ctr">
-              <a:lnSpc>
-                <a:spcPct val="105000"/>
-              </a:lnSpc>
-              <a:buNone/>
-            </a:pPr>
-            <a:r>
-              <a:rPr lang="es-ES" sz="900" b="1" i="0" spc="40" dirty="0">
-                <a:solidFill>
-                  <a:srgbClr val="98C9EB"/>
-                </a:solidFill>
-                <a:latin typeface="Montserrat"/>
-                <a:cs typeface="Montserrat"/>
-              </a:rPr>
-              <a:t>EN PREPARACIÓN</a:t>
-            </a:r>
-            <a:endParaRPr lang="es-ES" sz="900" dirty="0"/>
+              <a:t>Cajas de cartón · onduladora y converting</a:t>
+            </a:r>
           </a:p>
         </p:txBody>
       </p:sp>
@@ -15987,7 +20424,7 @@
                 <a:latin typeface="Montserrat"/>
                 <a:cs typeface="Montserrat"/>
               </a:rPr>
-              <a:t>8</a:t>
+              <a:t>9</a:t>
             </a:r>
             <a:endParaRPr lang="es-ES" sz="900" dirty="0"/>
           </a:p>

--- a/presentaciones/Planificacion_Packaging_CL.pptx
+++ b/presentaciones/Planificacion_Packaging_CL.pptx
@@ -186,7 +186,7 @@
           </c:marker>
           <c:dLbls>
             <c:dLbl>
-              <c:idx val="21"/>
+              <c:idx val="20"/>
               <c:tx>
                 <c:rich>
                   <a:bodyPr/>
@@ -229,9 +229,9 @@
           </c:dLbls>
           <c:cat>
             <c:strRef>
-              <c:f>Sheet1!$A$2:$A$23</c:f>
+              <c:f>Sheet1!$A$2:$A$22</c:f>
               <c:strCache>
-                <c:ptCount val="22"/>
+                <c:ptCount val="21"/>
                 <c:pt idx="0">
                   <c:v>Ene 25</c:v>
                 </c:pt>
@@ -295,18 +295,15 @@
                 <c:pt idx="20">
                   <c:v>Sep 26</c:v>
                 </c:pt>
-                <c:pt idx="21">
-                  <c:v>Oct 26</c:v>
-                </c:pt>
               </c:strCache>
             </c:strRef>
           </c:cat>
           <c:val>
             <c:numRef>
-              <c:f>Sheet1!$B$2:$B$23</c:f>
+              <c:f>Sheet1!$B$2:$B$22</c:f>
               <c:numCache>
                 <c:formatCode>0%</c:formatCode>
-                <c:ptCount val="22"/>
+                <c:ptCount val="21"/>
                 <c:pt idx="0">
                   <c:v>0.61</c:v>
                 </c:pt>
@@ -370,9 +367,6 @@
                 <c:pt idx="20">
                   <c:v>0.86</c:v>
                 </c:pt>
-                <c:pt idx="21">
-                  <c:v>0.86</c:v>
-                </c:pt>
               </c:numCache>
             </c:numRef>
           </c:val>
@@ -415,14 +409,14 @@
           </c:marker>
           <c:dLbls>
             <c:dLbl>
-              <c:idx val="21"/>
+              <c:idx val="20"/>
               <c:tx>
                 <c:rich>
                   <a:bodyPr/>
                   <a:lstStyle/>
                   <a:p>
                     <a:r>
-                      <a:t>100%</a:t>
+                      <a:t>96%</a:t>
                     </a:r>
                   </a:p>
                 </c:rich>
@@ -458,9 +452,9 @@
           </c:dLbls>
           <c:cat>
             <c:strRef>
-              <c:f>Sheet1!$A$2:$A$23</c:f>
+              <c:f>Sheet1!$A$2:$A$22</c:f>
               <c:strCache>
-                <c:ptCount val="22"/>
+                <c:ptCount val="21"/>
                 <c:pt idx="0">
                   <c:v>Ene 25</c:v>
                 </c:pt>
@@ -524,18 +518,15 @@
                 <c:pt idx="20">
                   <c:v>Sep 26</c:v>
                 </c:pt>
-                <c:pt idx="21">
-                  <c:v>Oct 26</c:v>
-                </c:pt>
               </c:strCache>
             </c:strRef>
           </c:cat>
           <c:val>
             <c:numRef>
-              <c:f>Sheet1!$C$2:$C$23</c:f>
+              <c:f>Sheet1!$C$2:$C$22</c:f>
               <c:numCache>
                 <c:formatCode>0%</c:formatCode>
-                <c:ptCount val="22"/>
+                <c:ptCount val="21"/>
                 <c:pt idx="0">
                   <c:v>0.76</c:v>
                 </c:pt>
@@ -599,9 +590,6 @@
                 <c:pt idx="20">
                   <c:v>0.96</c:v>
                 </c:pt>
-                <c:pt idx="21">
-                  <c:v>1.0</c:v>
-                </c:pt>
               </c:numCache>
             </c:numRef>
           </c:val>
@@ -644,14 +632,14 @@
           </c:marker>
           <c:dLbls>
             <c:dLbl>
-              <c:idx val="21"/>
+              <c:idx val="20"/>
               <c:tx>
                 <c:rich>
                   <a:bodyPr/>
                   <a:lstStyle/>
                   <a:p>
                     <a:r>
-                      <a:t>78%</a:t>
+                      <a:t>82%</a:t>
                     </a:r>
                   </a:p>
                 </c:rich>
@@ -669,7 +657,7 @@
                   </a:pPr>
                 </a:p>
               </c:txPr>
-              <c:dLblPos val="r"/>
+              <c:dLblPos val="b"/>
               <c:showLegendKey val="0"/>
               <c:showVal val="1"/>
               <c:showCatName val="0"/>
@@ -687,9 +675,9 @@
           </c:dLbls>
           <c:cat>
             <c:strRef>
-              <c:f>Sheet1!$A$2:$A$23</c:f>
+              <c:f>Sheet1!$A$2:$A$22</c:f>
               <c:strCache>
-                <c:ptCount val="22"/>
+                <c:ptCount val="21"/>
                 <c:pt idx="0">
                   <c:v>Ene 25</c:v>
                 </c:pt>
@@ -753,18 +741,15 @@
                 <c:pt idx="20">
                   <c:v>Sep 26</c:v>
                 </c:pt>
-                <c:pt idx="21">
-                  <c:v>Oct 26</c:v>
-                </c:pt>
               </c:strCache>
             </c:strRef>
           </c:cat>
           <c:val>
             <c:numRef>
-              <c:f>Sheet1!$D$2:$D$23</c:f>
+              <c:f>Sheet1!$D$2:$D$22</c:f>
               <c:numCache>
                 <c:formatCode>0%</c:formatCode>
-                <c:ptCount val="22"/>
+                <c:ptCount val="21"/>
                 <c:pt idx="0">
                   <c:v>0.51</c:v>
                 </c:pt>
@@ -828,9 +813,6 @@
                 <c:pt idx="20">
                   <c:v>0.82</c:v>
                 </c:pt>
-                <c:pt idx="21">
-                  <c:v>0.78</c:v>
-                </c:pt>
               </c:numCache>
             </c:numRef>
           </c:val>
@@ -863,7 +845,7 @@
         <c:auto val="1"/>
         <c:lblAlgn val="ctr"/>
         <c:lblOffset val="100"/>
-        <c:tickLblSkip val="3"/>
+        <c:tickLblSkip val="2"/>
         <c:noMultiLvlLbl val="0"/>
       </c:catAx>
       <c:valAx>
